--- a/ClinIQ_AI_Assessment.pptx
+++ b/ClinIQ_AI_Assessment.pptx
@@ -150,7 +150,7 @@
     </p:spTree>
     <p:extLst>
       <p:ext uri="{BB962C8B-B14F-4D97-AF65-F5344CB8AC3E}">
-        <p14:creationId xmlns:p14="http://schemas.microsoft.com/office/powerpoint/2010/main" val="3974777294"/>
+        <p14:creationId xmlns:p14="http://schemas.microsoft.com/office/powerpoint/2010/main" val="4110015527"/>
       </p:ext>
     </p:extLst>
   </p:cSld>
@@ -2306,7 +2306,7 @@
                   <a:srgbClr val="1B3A5C"/>
                 </a:solidFill>
               </a:rPr>
-              <a:t>✓  Automated Medication Review Engine</a:t>
+              <a:t>[&gt;] Automated Medication Review Engine</a:t>
             </a:r>
             <a:endParaRPr lang="en-US" sz="1100" dirty="0"/>
           </a:p>
@@ -2442,7 +2442,7 @@
                   <a:srgbClr val="1B3A5C"/>
                 </a:solidFill>
               </a:rPr>
-              <a:t>✓  LLM Recommendation Generator</a:t>
+              <a:t>[&gt;] LLM Recommendation Generator</a:t>
             </a:r>
             <a:endParaRPr lang="en-US" sz="1100" dirty="0"/>
           </a:p>
@@ -2578,7 +2578,7 @@
                   <a:srgbClr val="1B3A5C"/>
                 </a:solidFill>
               </a:rPr>
-              <a:t>✓  Pharmacist Approval Interface (HITL)</a:t>
+              <a:t>[&gt;] Pharmacist Approval Interface (HITL)</a:t>
             </a:r>
             <a:endParaRPr lang="en-US" sz="1100" dirty="0"/>
           </a:p>
@@ -2714,7 +2714,7 @@
                   <a:srgbClr val="1B3A5C"/>
                 </a:solidFill>
               </a:rPr>
-              <a:t>✓  Patient-Level Recommendation Reports</a:t>
+              <a:t>[&gt;] Patient-Level Recommendation Reports</a:t>
             </a:r>
             <a:endParaRPr lang="en-US" sz="1100" dirty="0"/>
           </a:p>
@@ -2886,7 +2886,7 @@
                   <a:srgbClr val="742A2A"/>
                 </a:solidFill>
               </a:rPr>
-              <a:t>✗  Epic / Surescripts integration</a:t>
+              <a:t>[X] Epic / Surescripts integration</a:t>
             </a:r>
             <a:endParaRPr lang="en-US" sz="950" dirty="0"/>
           </a:p>
@@ -3022,7 +3022,7 @@
                   <a:srgbClr val="742A2A"/>
                 </a:solidFill>
               </a:rPr>
-              <a:t>✗  Monthly CMS facility summary report</a:t>
+              <a:t>[X] Monthly CMS facility summary report</a:t>
             </a:r>
             <a:endParaRPr lang="en-US" sz="950" dirty="0"/>
           </a:p>
@@ -3158,7 +3158,7 @@
                   <a:srgbClr val="742A2A"/>
                 </a:solidFill>
               </a:rPr>
-              <a:t>✗  Provider direct messaging automation</a:t>
+              <a:t>[X] Provider direct messaging automation</a:t>
             </a:r>
             <a:endParaRPr lang="en-US" sz="950" dirty="0"/>
           </a:p>
@@ -3294,7 +3294,7 @@
                   <a:srgbClr val="742A2A"/>
                 </a:solidFill>
               </a:rPr>
-              <a:t>✗  Full EHR writeback</a:t>
+              <a:t>[X] Full EHR writeback</a:t>
             </a:r>
             <a:endParaRPr lang="en-US" sz="950" dirty="0"/>
           </a:p>
@@ -3430,7 +3430,7 @@
                   <a:srgbClr val="742A2A"/>
                 </a:solidFill>
               </a:rPr>
-              <a:t>✗  Advanced clinical decision support</a:t>
+              <a:t>[X] Advanced clinical decision support</a:t>
             </a:r>
             <a:endParaRPr lang="en-US" sz="950" dirty="0"/>
           </a:p>
@@ -3566,7 +3566,7 @@
                   <a:srgbClr val="742A2A"/>
                 </a:solidFill>
               </a:rPr>
-              <a:t>✗  Predictive medication risk scoring</a:t>
+              <a:t>[X] Predictive medication risk scoring</a:t>
             </a:r>
             <a:endParaRPr lang="en-US" sz="950" dirty="0"/>
           </a:p>
@@ -3702,7 +3702,7 @@
                   <a:srgbClr val="742A2A"/>
                 </a:solidFill>
               </a:rPr>
-              <a:t>✗  RPA / full workflow automation</a:t>
+              <a:t>[X] RPA / full workflow automation</a:t>
             </a:r>
             <a:endParaRPr lang="en-US" sz="950" dirty="0"/>
           </a:p>
@@ -5561,7 +5561,7 @@
                   <a:srgbClr val="1B3A5C"/>
                 </a:solidFill>
               </a:rPr>
-              <a:t>Clinical Dashboard ★</a:t>
+              <a:t>Clinical Dashboard [Core]</a:t>
             </a:r>
             <a:endParaRPr lang="en-US" sz="950" dirty="0"/>
           </a:p>
@@ -6403,7 +6403,7 @@
                   <a:srgbClr val="718096"/>
                 </a:solidFill>
               </a:rPr>
-              <a:t>★ = Core Screen / Most Critical View  (gold border)</a:t>
+              <a:t>[Core] = Core Screen / Most Critical View (gold border)</a:t>
             </a:r>
             <a:endParaRPr lang="en-US" sz="750" dirty="0"/>
           </a:p>
@@ -6698,37 +6698,31 @@
       </p:sp>
       <p:sp>
         <p:nvSpPr>
-          <p:cNvPr id="6" name="Text 4"/>
-          <p:cNvSpPr/>
-          <p:nvPr/>
-        </p:nvSpPr>
-        <p:spPr>
-          <a:xfrm>
-            <a:off x="1239012" y="1408176"/>
-            <a:ext cx="457200" cy="256032"/>
-          </a:xfrm>
-          <a:prstGeom prst="rect">
-            <a:avLst/>
-          </a:prstGeom>
-          <a:noFill/>
-          <a:ln/>
-        </p:spPr>
-        <p:txBody>
-          <a:bodyPr wrap="square" rtlCol="0" anchor="ctr"/>
-          <a:lstStyle/>
-          <a:p>
-            <a:pPr marL="0" indent="0" algn="ctr">
-              <a:buNone/>
-            </a:pPr>
-            <a:r>
-              <a:rPr lang="en-US" sz="1400" dirty="0">
-                <a:solidFill>
-                  <a:srgbClr val="718096"/>
-                </a:solidFill>
-              </a:rPr>
-              <a:t>↓</a:t>
-            </a:r>
-            <a:endParaRPr lang="en-US" sz="1400" dirty="0"/>
+          <p:cNvPr id="6" name="Shape 4"/>
+          <p:cNvSpPr/>
+          <p:nvPr/>
+        </p:nvSpPr>
+        <p:spPr>
+          <a:xfrm>
+            <a:off x="1458468" y="1408176"/>
+            <a:ext cx="0" cy="256032"/>
+          </a:xfrm>
+          <a:prstGeom prst="line">
+            <a:avLst/>
+          </a:prstGeom>
+          <a:noFill/>
+          <a:ln w="19050">
+            <a:solidFill>
+              <a:srgbClr val="718096"/>
+            </a:solidFill>
+            <a:prstDash val="solid"/>
+          </a:ln>
+        </p:spPr>
+        <p:txBody>
+          <a:bodyPr/>
+          <a:lstStyle/>
+          <a:p>
+            <a:endParaRPr lang="en-US"/>
           </a:p>
         </p:txBody>
       </p:sp>
@@ -6816,37 +6810,31 @@
       </p:sp>
       <p:sp>
         <p:nvSpPr>
-          <p:cNvPr id="9" name="Text 7"/>
-          <p:cNvSpPr/>
-          <p:nvPr/>
-        </p:nvSpPr>
-        <p:spPr>
-          <a:xfrm>
-            <a:off x="1239012" y="2212848"/>
-            <a:ext cx="457200" cy="256032"/>
-          </a:xfrm>
-          <a:prstGeom prst="rect">
-            <a:avLst/>
-          </a:prstGeom>
-          <a:noFill/>
-          <a:ln/>
-        </p:spPr>
-        <p:txBody>
-          <a:bodyPr wrap="square" rtlCol="0" anchor="ctr"/>
-          <a:lstStyle/>
-          <a:p>
-            <a:pPr marL="0" indent="0" algn="ctr">
-              <a:buNone/>
-            </a:pPr>
-            <a:r>
-              <a:rPr lang="en-US" sz="1400" dirty="0">
-                <a:solidFill>
-                  <a:srgbClr val="718096"/>
-                </a:solidFill>
-              </a:rPr>
-              <a:t>↓</a:t>
-            </a:r>
-            <a:endParaRPr lang="en-US" sz="1400" dirty="0"/>
+          <p:cNvPr id="9" name="Shape 7"/>
+          <p:cNvSpPr/>
+          <p:nvPr/>
+        </p:nvSpPr>
+        <p:spPr>
+          <a:xfrm>
+            <a:off x="1458468" y="2212848"/>
+            <a:ext cx="0" cy="256032"/>
+          </a:xfrm>
+          <a:prstGeom prst="line">
+            <a:avLst/>
+          </a:prstGeom>
+          <a:noFill/>
+          <a:ln w="19050">
+            <a:solidFill>
+              <a:srgbClr val="718096"/>
+            </a:solidFill>
+            <a:prstDash val="solid"/>
+          </a:ln>
+        </p:spPr>
+        <p:txBody>
+          <a:bodyPr/>
+          <a:lstStyle/>
+          <a:p>
+            <a:endParaRPr lang="en-US"/>
           </a:p>
         </p:txBody>
       </p:sp>
@@ -6934,37 +6922,31 @@
       </p:sp>
       <p:sp>
         <p:nvSpPr>
-          <p:cNvPr id="12" name="Text 10"/>
-          <p:cNvSpPr/>
-          <p:nvPr/>
-        </p:nvSpPr>
-        <p:spPr>
-          <a:xfrm>
-            <a:off x="1239012" y="3017520"/>
-            <a:ext cx="457200" cy="256032"/>
-          </a:xfrm>
-          <a:prstGeom prst="rect">
-            <a:avLst/>
-          </a:prstGeom>
-          <a:noFill/>
-          <a:ln/>
-        </p:spPr>
-        <p:txBody>
-          <a:bodyPr wrap="square" rtlCol="0" anchor="ctr"/>
-          <a:lstStyle/>
-          <a:p>
-            <a:pPr marL="0" indent="0" algn="ctr">
-              <a:buNone/>
-            </a:pPr>
-            <a:r>
-              <a:rPr lang="en-US" sz="1400" dirty="0">
-                <a:solidFill>
-                  <a:srgbClr val="718096"/>
-                </a:solidFill>
-              </a:rPr>
-              <a:t>↓</a:t>
-            </a:r>
-            <a:endParaRPr lang="en-US" sz="1400" dirty="0"/>
+          <p:cNvPr id="12" name="Shape 10"/>
+          <p:cNvSpPr/>
+          <p:nvPr/>
+        </p:nvSpPr>
+        <p:spPr>
+          <a:xfrm>
+            <a:off x="1458468" y="3017520"/>
+            <a:ext cx="0" cy="256032"/>
+          </a:xfrm>
+          <a:prstGeom prst="line">
+            <a:avLst/>
+          </a:prstGeom>
+          <a:noFill/>
+          <a:ln w="19050">
+            <a:solidFill>
+              <a:srgbClr val="718096"/>
+            </a:solidFill>
+            <a:prstDash val="solid"/>
+          </a:ln>
+        </p:spPr>
+        <p:txBody>
+          <a:bodyPr/>
+          <a:lstStyle/>
+          <a:p>
+            <a:endParaRPr lang="en-US"/>
           </a:p>
         </p:txBody>
       </p:sp>
@@ -7052,37 +7034,31 @@
       </p:sp>
       <p:sp>
         <p:nvSpPr>
-          <p:cNvPr id="15" name="Text 13"/>
-          <p:cNvSpPr/>
-          <p:nvPr/>
-        </p:nvSpPr>
-        <p:spPr>
-          <a:xfrm>
-            <a:off x="1239012" y="3822192"/>
-            <a:ext cx="457200" cy="256032"/>
-          </a:xfrm>
-          <a:prstGeom prst="rect">
-            <a:avLst/>
-          </a:prstGeom>
-          <a:noFill/>
-          <a:ln/>
-        </p:spPr>
-        <p:txBody>
-          <a:bodyPr wrap="square" rtlCol="0" anchor="ctr"/>
-          <a:lstStyle/>
-          <a:p>
-            <a:pPr marL="0" indent="0" algn="ctr">
-              <a:buNone/>
-            </a:pPr>
-            <a:r>
-              <a:rPr lang="en-US" sz="1400" dirty="0">
-                <a:solidFill>
-                  <a:srgbClr val="718096"/>
-                </a:solidFill>
-              </a:rPr>
-              <a:t>↓</a:t>
-            </a:r>
-            <a:endParaRPr lang="en-US" sz="1400" dirty="0"/>
+          <p:cNvPr id="15" name="Shape 13"/>
+          <p:cNvSpPr/>
+          <p:nvPr/>
+        </p:nvSpPr>
+        <p:spPr>
+          <a:xfrm>
+            <a:off x="1458468" y="3822192"/>
+            <a:ext cx="0" cy="256032"/>
+          </a:xfrm>
+          <a:prstGeom prst="line">
+            <a:avLst/>
+          </a:prstGeom>
+          <a:noFill/>
+          <a:ln w="19050">
+            <a:solidFill>
+              <a:srgbClr val="718096"/>
+            </a:solidFill>
+            <a:prstDash val="solid"/>
+          </a:ln>
+        </p:spPr>
+        <p:txBody>
+          <a:bodyPr/>
+          <a:lstStyle/>
+          <a:p>
+            <a:endParaRPr lang="en-US"/>
           </a:p>
         </p:txBody>
       </p:sp>
@@ -7252,37 +7228,31 @@
       </p:sp>
       <p:sp>
         <p:nvSpPr>
-          <p:cNvPr id="20" name="Text 18"/>
-          <p:cNvSpPr/>
-          <p:nvPr/>
-        </p:nvSpPr>
-        <p:spPr>
-          <a:xfrm>
-            <a:off x="4183380" y="1408176"/>
-            <a:ext cx="457200" cy="256032"/>
-          </a:xfrm>
-          <a:prstGeom prst="rect">
-            <a:avLst/>
-          </a:prstGeom>
-          <a:noFill/>
-          <a:ln/>
-        </p:spPr>
-        <p:txBody>
-          <a:bodyPr wrap="square" rtlCol="0" anchor="ctr"/>
-          <a:lstStyle/>
-          <a:p>
-            <a:pPr marL="0" indent="0" algn="ctr">
-              <a:buNone/>
-            </a:pPr>
-            <a:r>
-              <a:rPr lang="en-US" sz="1400" dirty="0">
-                <a:solidFill>
-                  <a:srgbClr val="718096"/>
-                </a:solidFill>
-              </a:rPr>
-              <a:t>↓</a:t>
-            </a:r>
-            <a:endParaRPr lang="en-US" sz="1400" dirty="0"/>
+          <p:cNvPr id="20" name="Shape 18"/>
+          <p:cNvSpPr/>
+          <p:nvPr/>
+        </p:nvSpPr>
+        <p:spPr>
+          <a:xfrm>
+            <a:off x="4402836" y="1408176"/>
+            <a:ext cx="0" cy="256032"/>
+          </a:xfrm>
+          <a:prstGeom prst="line">
+            <a:avLst/>
+          </a:prstGeom>
+          <a:noFill/>
+          <a:ln w="19050">
+            <a:solidFill>
+              <a:srgbClr val="718096"/>
+            </a:solidFill>
+            <a:prstDash val="solid"/>
+          </a:ln>
+        </p:spPr>
+        <p:txBody>
+          <a:bodyPr/>
+          <a:lstStyle/>
+          <a:p>
+            <a:endParaRPr lang="en-US"/>
           </a:p>
         </p:txBody>
       </p:sp>
@@ -7370,37 +7340,31 @@
       </p:sp>
       <p:sp>
         <p:nvSpPr>
-          <p:cNvPr id="23" name="Text 21"/>
-          <p:cNvSpPr/>
-          <p:nvPr/>
-        </p:nvSpPr>
-        <p:spPr>
-          <a:xfrm>
-            <a:off x="4183380" y="2212848"/>
-            <a:ext cx="457200" cy="256032"/>
-          </a:xfrm>
-          <a:prstGeom prst="rect">
-            <a:avLst/>
-          </a:prstGeom>
-          <a:noFill/>
-          <a:ln/>
-        </p:spPr>
-        <p:txBody>
-          <a:bodyPr wrap="square" rtlCol="0" anchor="ctr"/>
-          <a:lstStyle/>
-          <a:p>
-            <a:pPr marL="0" indent="0" algn="ctr">
-              <a:buNone/>
-            </a:pPr>
-            <a:r>
-              <a:rPr lang="en-US" sz="1400" dirty="0">
-                <a:solidFill>
-                  <a:srgbClr val="718096"/>
-                </a:solidFill>
-              </a:rPr>
-              <a:t>↓</a:t>
-            </a:r>
-            <a:endParaRPr lang="en-US" sz="1400" dirty="0"/>
+          <p:cNvPr id="23" name="Shape 21"/>
+          <p:cNvSpPr/>
+          <p:nvPr/>
+        </p:nvSpPr>
+        <p:spPr>
+          <a:xfrm>
+            <a:off x="4402836" y="2212848"/>
+            <a:ext cx="0" cy="256032"/>
+          </a:xfrm>
+          <a:prstGeom prst="line">
+            <a:avLst/>
+          </a:prstGeom>
+          <a:noFill/>
+          <a:ln w="19050">
+            <a:solidFill>
+              <a:srgbClr val="718096"/>
+            </a:solidFill>
+            <a:prstDash val="solid"/>
+          </a:ln>
+        </p:spPr>
+        <p:txBody>
+          <a:bodyPr/>
+          <a:lstStyle/>
+          <a:p>
+            <a:endParaRPr lang="en-US"/>
           </a:p>
         </p:txBody>
       </p:sp>
@@ -7488,37 +7452,31 @@
       </p:sp>
       <p:sp>
         <p:nvSpPr>
-          <p:cNvPr id="26" name="Text 24"/>
-          <p:cNvSpPr/>
-          <p:nvPr/>
-        </p:nvSpPr>
-        <p:spPr>
-          <a:xfrm>
-            <a:off x="4183380" y="3017520"/>
-            <a:ext cx="457200" cy="256032"/>
-          </a:xfrm>
-          <a:prstGeom prst="rect">
-            <a:avLst/>
-          </a:prstGeom>
-          <a:noFill/>
-          <a:ln/>
-        </p:spPr>
-        <p:txBody>
-          <a:bodyPr wrap="square" rtlCol="0" anchor="ctr"/>
-          <a:lstStyle/>
-          <a:p>
-            <a:pPr marL="0" indent="0" algn="ctr">
-              <a:buNone/>
-            </a:pPr>
-            <a:r>
-              <a:rPr lang="en-US" sz="1400" dirty="0">
-                <a:solidFill>
-                  <a:srgbClr val="718096"/>
-                </a:solidFill>
-              </a:rPr>
-              <a:t>↓</a:t>
-            </a:r>
-            <a:endParaRPr lang="en-US" sz="1400" dirty="0"/>
+          <p:cNvPr id="26" name="Shape 24"/>
+          <p:cNvSpPr/>
+          <p:nvPr/>
+        </p:nvSpPr>
+        <p:spPr>
+          <a:xfrm>
+            <a:off x="4402836" y="3017520"/>
+            <a:ext cx="0" cy="256032"/>
+          </a:xfrm>
+          <a:prstGeom prst="line">
+            <a:avLst/>
+          </a:prstGeom>
+          <a:noFill/>
+          <a:ln w="19050">
+            <a:solidFill>
+              <a:srgbClr val="718096"/>
+            </a:solidFill>
+            <a:prstDash val="solid"/>
+          </a:ln>
+        </p:spPr>
+        <p:txBody>
+          <a:bodyPr/>
+          <a:lstStyle/>
+          <a:p>
+            <a:endParaRPr lang="en-US"/>
           </a:p>
         </p:txBody>
       </p:sp>
@@ -7606,37 +7564,31 @@
       </p:sp>
       <p:sp>
         <p:nvSpPr>
-          <p:cNvPr id="29" name="Text 27"/>
-          <p:cNvSpPr/>
-          <p:nvPr/>
-        </p:nvSpPr>
-        <p:spPr>
-          <a:xfrm>
-            <a:off x="4183380" y="3822192"/>
-            <a:ext cx="457200" cy="256032"/>
-          </a:xfrm>
-          <a:prstGeom prst="rect">
-            <a:avLst/>
-          </a:prstGeom>
-          <a:noFill/>
-          <a:ln/>
-        </p:spPr>
-        <p:txBody>
-          <a:bodyPr wrap="square" rtlCol="0" anchor="ctr"/>
-          <a:lstStyle/>
-          <a:p>
-            <a:pPr marL="0" indent="0" algn="ctr">
-              <a:buNone/>
-            </a:pPr>
-            <a:r>
-              <a:rPr lang="en-US" sz="1400" dirty="0">
-                <a:solidFill>
-                  <a:srgbClr val="718096"/>
-                </a:solidFill>
-              </a:rPr>
-              <a:t>↓</a:t>
-            </a:r>
-            <a:endParaRPr lang="en-US" sz="1400" dirty="0"/>
+          <p:cNvPr id="29" name="Shape 27"/>
+          <p:cNvSpPr/>
+          <p:nvPr/>
+        </p:nvSpPr>
+        <p:spPr>
+          <a:xfrm>
+            <a:off x="4402836" y="3822192"/>
+            <a:ext cx="0" cy="256032"/>
+          </a:xfrm>
+          <a:prstGeom prst="line">
+            <a:avLst/>
+          </a:prstGeom>
+          <a:noFill/>
+          <a:ln w="19050">
+            <a:solidFill>
+              <a:srgbClr val="718096"/>
+            </a:solidFill>
+            <a:prstDash val="solid"/>
+          </a:ln>
+        </p:spPr>
+        <p:txBody>
+          <a:bodyPr/>
+          <a:lstStyle/>
+          <a:p>
+            <a:endParaRPr lang="en-US"/>
           </a:p>
         </p:txBody>
       </p:sp>
@@ -8012,145 +7964,121 @@
       </p:sp>
       <p:sp>
         <p:nvSpPr>
-          <p:cNvPr id="38" name="Text 36"/>
-          <p:cNvSpPr/>
-          <p:nvPr/>
-        </p:nvSpPr>
-        <p:spPr>
-          <a:xfrm>
-            <a:off x="2770632" y="4069080"/>
-            <a:ext cx="256032" cy="457200"/>
-          </a:xfrm>
-          <a:prstGeom prst="rect">
-            <a:avLst/>
-          </a:prstGeom>
-          <a:noFill/>
-          <a:ln/>
-        </p:spPr>
-        <p:txBody>
-          <a:bodyPr wrap="square" rtlCol="0" anchor="ctr"/>
-          <a:lstStyle/>
-          <a:p>
-            <a:pPr marL="0" indent="0" algn="ctr">
-              <a:buNone/>
-            </a:pPr>
-            <a:r>
-              <a:rPr lang="en-US" sz="1400" dirty="0">
-                <a:solidFill>
-                  <a:srgbClr val="718096"/>
-                </a:solidFill>
-              </a:rPr>
-              <a:t>→</a:t>
-            </a:r>
-            <a:endParaRPr lang="en-US" sz="1400" dirty="0"/>
-          </a:p>
-        </p:txBody>
-      </p:sp>
-      <p:sp>
-        <p:nvSpPr>
-          <p:cNvPr id="39" name="Text 37"/>
-          <p:cNvSpPr/>
-          <p:nvPr/>
-        </p:nvSpPr>
-        <p:spPr>
-          <a:xfrm>
-            <a:off x="5715000" y="850392"/>
-            <a:ext cx="256032" cy="457200"/>
-          </a:xfrm>
-          <a:prstGeom prst="rect">
-            <a:avLst/>
-          </a:prstGeom>
-          <a:noFill/>
-          <a:ln/>
-        </p:spPr>
-        <p:txBody>
-          <a:bodyPr wrap="square" rtlCol="0" anchor="ctr"/>
-          <a:lstStyle/>
-          <a:p>
-            <a:pPr marL="0" indent="0" algn="ctr">
-              <a:buNone/>
-            </a:pPr>
-            <a:r>
-              <a:rPr lang="en-US" sz="1400" dirty="0">
-                <a:solidFill>
-                  <a:srgbClr val="718096"/>
-                </a:solidFill>
-              </a:rPr>
-              <a:t>→</a:t>
-            </a:r>
-            <a:endParaRPr lang="en-US" sz="1400" dirty="0"/>
-          </a:p>
-        </p:txBody>
-      </p:sp>
-      <p:sp>
-        <p:nvSpPr>
-          <p:cNvPr id="40" name="Text 38"/>
-          <p:cNvSpPr/>
-          <p:nvPr/>
-        </p:nvSpPr>
-        <p:spPr>
-          <a:xfrm>
-            <a:off x="5715000" y="2459736"/>
-            <a:ext cx="256032" cy="457200"/>
-          </a:xfrm>
-          <a:prstGeom prst="rect">
-            <a:avLst/>
-          </a:prstGeom>
-          <a:noFill/>
-          <a:ln/>
-        </p:spPr>
-        <p:txBody>
-          <a:bodyPr wrap="square" rtlCol="0" anchor="ctr"/>
-          <a:lstStyle/>
-          <a:p>
-            <a:pPr marL="0" indent="0" algn="ctr">
-              <a:buNone/>
-            </a:pPr>
-            <a:r>
-              <a:rPr lang="en-US" sz="1400" dirty="0">
-                <a:solidFill>
-                  <a:srgbClr val="718096"/>
-                </a:solidFill>
-              </a:rPr>
-              <a:t>→</a:t>
-            </a:r>
-            <a:endParaRPr lang="en-US" sz="1400" dirty="0"/>
-          </a:p>
-        </p:txBody>
-      </p:sp>
-      <p:sp>
-        <p:nvSpPr>
-          <p:cNvPr id="41" name="Text 39"/>
-          <p:cNvSpPr/>
-          <p:nvPr/>
-        </p:nvSpPr>
-        <p:spPr>
-          <a:xfrm>
-            <a:off x="5715000" y="4069080"/>
-            <a:ext cx="256032" cy="457200"/>
-          </a:xfrm>
-          <a:prstGeom prst="rect">
-            <a:avLst/>
-          </a:prstGeom>
-          <a:noFill/>
-          <a:ln/>
-        </p:spPr>
-        <p:txBody>
-          <a:bodyPr wrap="square" rtlCol="0" anchor="ctr"/>
-          <a:lstStyle/>
-          <a:p>
-            <a:pPr marL="0" indent="0" algn="ctr">
-              <a:buNone/>
-            </a:pPr>
-            <a:r>
-              <a:rPr lang="en-US" sz="1400" dirty="0">
-                <a:solidFill>
-                  <a:srgbClr val="718096"/>
-                </a:solidFill>
-              </a:rPr>
-              <a:t>→</a:t>
-            </a:r>
-            <a:endParaRPr lang="en-US" sz="1400" dirty="0"/>
+          <p:cNvPr id="38" name="Shape 36"/>
+          <p:cNvSpPr/>
+          <p:nvPr/>
+        </p:nvSpPr>
+        <p:spPr>
+          <a:xfrm>
+            <a:off x="2770632" y="4288536"/>
+            <a:ext cx="256032" cy="0"/>
+          </a:xfrm>
+          <a:prstGeom prst="line">
+            <a:avLst/>
+          </a:prstGeom>
+          <a:noFill/>
+          <a:ln w="19050">
+            <a:solidFill>
+              <a:srgbClr val="718096"/>
+            </a:solidFill>
+            <a:prstDash val="solid"/>
+          </a:ln>
+        </p:spPr>
+        <p:txBody>
+          <a:bodyPr/>
+          <a:lstStyle/>
+          <a:p>
+            <a:endParaRPr lang="en-US"/>
+          </a:p>
+        </p:txBody>
+      </p:sp>
+      <p:sp>
+        <p:nvSpPr>
+          <p:cNvPr id="39" name="Shape 37"/>
+          <p:cNvSpPr/>
+          <p:nvPr/>
+        </p:nvSpPr>
+        <p:spPr>
+          <a:xfrm>
+            <a:off x="5715000" y="1069848"/>
+            <a:ext cx="256032" cy="0"/>
+          </a:xfrm>
+          <a:prstGeom prst="line">
+            <a:avLst/>
+          </a:prstGeom>
+          <a:noFill/>
+          <a:ln w="19050">
+            <a:solidFill>
+              <a:srgbClr val="718096"/>
+            </a:solidFill>
+            <a:prstDash val="solid"/>
+          </a:ln>
+        </p:spPr>
+        <p:txBody>
+          <a:bodyPr/>
+          <a:lstStyle/>
+          <a:p>
+            <a:endParaRPr lang="en-US"/>
+          </a:p>
+        </p:txBody>
+      </p:sp>
+      <p:sp>
+        <p:nvSpPr>
+          <p:cNvPr id="40" name="Shape 38"/>
+          <p:cNvSpPr/>
+          <p:nvPr/>
+        </p:nvSpPr>
+        <p:spPr>
+          <a:xfrm>
+            <a:off x="5715000" y="2679192"/>
+            <a:ext cx="256032" cy="0"/>
+          </a:xfrm>
+          <a:prstGeom prst="line">
+            <a:avLst/>
+          </a:prstGeom>
+          <a:noFill/>
+          <a:ln w="19050">
+            <a:solidFill>
+              <a:srgbClr val="718096"/>
+            </a:solidFill>
+            <a:prstDash val="solid"/>
+          </a:ln>
+        </p:spPr>
+        <p:txBody>
+          <a:bodyPr/>
+          <a:lstStyle/>
+          <a:p>
+            <a:endParaRPr lang="en-US"/>
+          </a:p>
+        </p:txBody>
+      </p:sp>
+      <p:sp>
+        <p:nvSpPr>
+          <p:cNvPr id="41" name="Shape 39"/>
+          <p:cNvSpPr/>
+          <p:nvPr/>
+        </p:nvSpPr>
+        <p:spPr>
+          <a:xfrm>
+            <a:off x="5715000" y="4288536"/>
+            <a:ext cx="256032" cy="0"/>
+          </a:xfrm>
+          <a:prstGeom prst="line">
+            <a:avLst/>
+          </a:prstGeom>
+          <a:noFill/>
+          <a:ln w="19050">
+            <a:solidFill>
+              <a:srgbClr val="718096"/>
+            </a:solidFill>
+            <a:prstDash val="solid"/>
+          </a:ln>
+        </p:spPr>
+        <p:txBody>
+          <a:bodyPr/>
+          <a:lstStyle/>
+          <a:p>
+            <a:endParaRPr lang="en-US"/>
           </a:p>
         </p:txBody>
       </p:sp>
@@ -8497,37 +8425,31 @@
       </p:sp>
       <p:sp>
         <p:nvSpPr>
-          <p:cNvPr id="6" name="Text 4"/>
-          <p:cNvSpPr/>
-          <p:nvPr/>
-        </p:nvSpPr>
-        <p:spPr>
-          <a:xfrm>
-            <a:off x="4133088" y="685800"/>
-            <a:ext cx="868680" cy="320040"/>
-          </a:xfrm>
-          <a:prstGeom prst="rect">
-            <a:avLst/>
-          </a:prstGeom>
-          <a:noFill/>
-          <a:ln/>
-        </p:spPr>
-        <p:txBody>
-          <a:bodyPr wrap="square" rtlCol="0" anchor="ctr"/>
-          <a:lstStyle/>
-          <a:p>
-            <a:pPr marL="0" indent="0" algn="ctr">
-              <a:buNone/>
-            </a:pPr>
-            <a:r>
-              <a:rPr lang="en-US" sz="1600" dirty="0">
-                <a:solidFill>
-                  <a:srgbClr val="718096"/>
-                </a:solidFill>
-              </a:rPr>
-              <a:t>→</a:t>
-            </a:r>
-            <a:endParaRPr lang="en-US" sz="1600" dirty="0"/>
+          <p:cNvPr id="6" name="Shape 4"/>
+          <p:cNvSpPr/>
+          <p:nvPr/>
+        </p:nvSpPr>
+        <p:spPr>
+          <a:xfrm>
+            <a:off x="4206240" y="845820"/>
+            <a:ext cx="685800" cy="0"/>
+          </a:xfrm>
+          <a:prstGeom prst="line">
+            <a:avLst/>
+          </a:prstGeom>
+          <a:noFill/>
+          <a:ln w="19050">
+            <a:solidFill>
+              <a:srgbClr val="718096"/>
+            </a:solidFill>
+            <a:prstDash val="solid"/>
+          </a:ln>
+        </p:spPr>
+        <p:txBody>
+          <a:bodyPr/>
+          <a:lstStyle/>
+          <a:p>
+            <a:endParaRPr lang="en-US"/>
           </a:p>
         </p:txBody>
       </p:sp>
@@ -8661,7 +8583,7 @@
                   <a:srgbClr val="742A2A"/>
                 </a:solidFill>
               </a:rPr>
-              <a:t>✗  Manual EHR login per facility</a:t>
+              <a:t>[X] Manual EHR login per facility</a:t>
             </a:r>
             <a:endParaRPr lang="en-US" sz="900" dirty="0"/>
           </a:p>
@@ -8669,37 +8591,31 @@
       </p:sp>
       <p:sp>
         <p:nvSpPr>
-          <p:cNvPr id="11" name="Text 9"/>
-          <p:cNvSpPr/>
-          <p:nvPr/>
-        </p:nvSpPr>
-        <p:spPr>
-          <a:xfrm>
-            <a:off x="4133088" y="1078992"/>
-            <a:ext cx="868680" cy="310896"/>
-          </a:xfrm>
-          <a:prstGeom prst="rect">
-            <a:avLst/>
-          </a:prstGeom>
-          <a:noFill/>
-          <a:ln/>
-        </p:spPr>
-        <p:txBody>
-          <a:bodyPr wrap="square" rtlCol="0" anchor="ctr"/>
-          <a:lstStyle/>
-          <a:p>
-            <a:pPr marL="0" indent="0" algn="ctr">
-              <a:buNone/>
-            </a:pPr>
-            <a:r>
-              <a:rPr lang="en-US" sz="1200" dirty="0">
-                <a:solidFill>
-                  <a:srgbClr val="718096"/>
-                </a:solidFill>
-              </a:rPr>
-              <a:t>→</a:t>
-            </a:r>
-            <a:endParaRPr lang="en-US" sz="1200" dirty="0"/>
+          <p:cNvPr id="11" name="Shape 9"/>
+          <p:cNvSpPr/>
+          <p:nvPr/>
+        </p:nvSpPr>
+        <p:spPr>
+          <a:xfrm>
+            <a:off x="4206240" y="1234440"/>
+            <a:ext cx="640080" cy="0"/>
+          </a:xfrm>
+          <a:prstGeom prst="line">
+            <a:avLst/>
+          </a:prstGeom>
+          <a:noFill/>
+          <a:ln w="12700">
+            <a:solidFill>
+              <a:srgbClr val="718096"/>
+            </a:solidFill>
+            <a:prstDash val="solid"/>
+          </a:ln>
+        </p:spPr>
+        <p:txBody>
+          <a:bodyPr/>
+          <a:lstStyle/>
+          <a:p>
+            <a:endParaRPr lang="en-US"/>
           </a:p>
         </p:txBody>
       </p:sp>
@@ -8765,7 +8681,7 @@
                   <a:srgbClr val="276749"/>
                 </a:solidFill>
               </a:rPr>
-              <a:t>✓  Automated data pull via FHIR/PCC API</a:t>
+              <a:t>[&gt;] Automated data pull via FHIR/PCC API</a:t>
             </a:r>
             <a:endParaRPr lang="en-US" sz="900" dirty="0"/>
           </a:p>
@@ -8833,7 +8749,7 @@
                   <a:srgbClr val="742A2A"/>
                 </a:solidFill>
               </a:rPr>
-              <a:t>✗  Manual census &amp; MAR report running</a:t>
+              <a:t>[X] Manual census &amp; MAR report running</a:t>
             </a:r>
             <a:endParaRPr lang="en-US" sz="900" dirty="0"/>
           </a:p>
@@ -8841,37 +8757,31 @@
       </p:sp>
       <p:sp>
         <p:nvSpPr>
-          <p:cNvPr id="16" name="Text 14"/>
-          <p:cNvSpPr/>
-          <p:nvPr/>
-        </p:nvSpPr>
-        <p:spPr>
-          <a:xfrm>
-            <a:off x="4133088" y="1426464"/>
-            <a:ext cx="868680" cy="310896"/>
-          </a:xfrm>
-          <a:prstGeom prst="rect">
-            <a:avLst/>
-          </a:prstGeom>
-          <a:noFill/>
-          <a:ln/>
-        </p:spPr>
-        <p:txBody>
-          <a:bodyPr wrap="square" rtlCol="0" anchor="ctr"/>
-          <a:lstStyle/>
-          <a:p>
-            <a:pPr marL="0" indent="0" algn="ctr">
-              <a:buNone/>
-            </a:pPr>
-            <a:r>
-              <a:rPr lang="en-US" sz="1200" dirty="0">
-                <a:solidFill>
-                  <a:srgbClr val="718096"/>
-                </a:solidFill>
-              </a:rPr>
-              <a:t>→</a:t>
-            </a:r>
-            <a:endParaRPr lang="en-US" sz="1200" dirty="0"/>
+          <p:cNvPr id="16" name="Shape 14"/>
+          <p:cNvSpPr/>
+          <p:nvPr/>
+        </p:nvSpPr>
+        <p:spPr>
+          <a:xfrm>
+            <a:off x="4206240" y="1581912"/>
+            <a:ext cx="640080" cy="0"/>
+          </a:xfrm>
+          <a:prstGeom prst="line">
+            <a:avLst/>
+          </a:prstGeom>
+          <a:noFill/>
+          <a:ln w="12700">
+            <a:solidFill>
+              <a:srgbClr val="718096"/>
+            </a:solidFill>
+            <a:prstDash val="solid"/>
+          </a:ln>
+        </p:spPr>
+        <p:txBody>
+          <a:bodyPr/>
+          <a:lstStyle/>
+          <a:p>
+            <a:endParaRPr lang="en-US"/>
           </a:p>
         </p:txBody>
       </p:sp>
@@ -8937,7 +8847,7 @@
                   <a:srgbClr val="276749"/>
                 </a:solidFill>
               </a:rPr>
-              <a:t>✓  Real-time patient data sync with auto-alerts</a:t>
+              <a:t>[&gt;] Real-time patient data sync with auto-alerts</a:t>
             </a:r>
             <a:endParaRPr lang="en-US" sz="900" dirty="0"/>
           </a:p>
@@ -9005,7 +8915,7 @@
                   <a:srgbClr val="742A2A"/>
                 </a:solidFill>
               </a:rPr>
-              <a:t>✗  Manual patient identification for review</a:t>
+              <a:t>[X] Manual patient identification for review</a:t>
             </a:r>
             <a:endParaRPr lang="en-US" sz="900" dirty="0"/>
           </a:p>
@@ -9013,37 +8923,31 @@
       </p:sp>
       <p:sp>
         <p:nvSpPr>
-          <p:cNvPr id="21" name="Text 19"/>
-          <p:cNvSpPr/>
-          <p:nvPr/>
-        </p:nvSpPr>
-        <p:spPr>
-          <a:xfrm>
-            <a:off x="4133088" y="1773936"/>
-            <a:ext cx="868680" cy="310896"/>
-          </a:xfrm>
-          <a:prstGeom prst="rect">
-            <a:avLst/>
-          </a:prstGeom>
-          <a:noFill/>
-          <a:ln/>
-        </p:spPr>
-        <p:txBody>
-          <a:bodyPr wrap="square" rtlCol="0" anchor="ctr"/>
-          <a:lstStyle/>
-          <a:p>
-            <a:pPr marL="0" indent="0" algn="ctr">
-              <a:buNone/>
-            </a:pPr>
-            <a:r>
-              <a:rPr lang="en-US" sz="1200" dirty="0">
-                <a:solidFill>
-                  <a:srgbClr val="718096"/>
-                </a:solidFill>
-              </a:rPr>
-              <a:t>→</a:t>
-            </a:r>
-            <a:endParaRPr lang="en-US" sz="1200" dirty="0"/>
+          <p:cNvPr id="21" name="Shape 19"/>
+          <p:cNvSpPr/>
+          <p:nvPr/>
+        </p:nvSpPr>
+        <p:spPr>
+          <a:xfrm>
+            <a:off x="4206240" y="1929384"/>
+            <a:ext cx="640080" cy="0"/>
+          </a:xfrm>
+          <a:prstGeom prst="line">
+            <a:avLst/>
+          </a:prstGeom>
+          <a:noFill/>
+          <a:ln w="12700">
+            <a:solidFill>
+              <a:srgbClr val="718096"/>
+            </a:solidFill>
+            <a:prstDash val="solid"/>
+          </a:ln>
+        </p:spPr>
+        <p:txBody>
+          <a:bodyPr/>
+          <a:lstStyle/>
+          <a:p>
+            <a:endParaRPr lang="en-US"/>
           </a:p>
         </p:txBody>
       </p:sp>
@@ -9109,7 +9013,7 @@
                   <a:srgbClr val="276749"/>
                 </a:solidFill>
               </a:rPr>
-              <a:t>✓  AI-triggered pipeline on admission or monthly cadence</a:t>
+              <a:t>[&gt;] AI-triggered pipeline on admission or monthly cadence</a:t>
             </a:r>
             <a:endParaRPr lang="en-US" sz="900" dirty="0"/>
           </a:p>
@@ -9177,7 +9081,7 @@
                   <a:srgbClr val="742A2A"/>
                 </a:solidFill>
               </a:rPr>
-              <a:t>✗  Manual chart review (meds, labs, notes)</a:t>
+              <a:t>[X] Manual chart review (meds, labs, notes)</a:t>
             </a:r>
             <a:endParaRPr lang="en-US" sz="900" dirty="0"/>
           </a:p>
@@ -9185,37 +9089,31 @@
       </p:sp>
       <p:sp>
         <p:nvSpPr>
-          <p:cNvPr id="26" name="Text 24"/>
-          <p:cNvSpPr/>
-          <p:nvPr/>
-        </p:nvSpPr>
-        <p:spPr>
-          <a:xfrm>
-            <a:off x="4133088" y="2121408"/>
-            <a:ext cx="868680" cy="310896"/>
-          </a:xfrm>
-          <a:prstGeom prst="rect">
-            <a:avLst/>
-          </a:prstGeom>
-          <a:noFill/>
-          <a:ln/>
-        </p:spPr>
-        <p:txBody>
-          <a:bodyPr wrap="square" rtlCol="0" anchor="ctr"/>
-          <a:lstStyle/>
-          <a:p>
-            <a:pPr marL="0" indent="0" algn="ctr">
-              <a:buNone/>
-            </a:pPr>
-            <a:r>
-              <a:rPr lang="en-US" sz="1200" dirty="0">
-                <a:solidFill>
-                  <a:srgbClr val="718096"/>
-                </a:solidFill>
-              </a:rPr>
-              <a:t>→</a:t>
-            </a:r>
-            <a:endParaRPr lang="en-US" sz="1200" dirty="0"/>
+          <p:cNvPr id="26" name="Shape 24"/>
+          <p:cNvSpPr/>
+          <p:nvPr/>
+        </p:nvSpPr>
+        <p:spPr>
+          <a:xfrm>
+            <a:off x="4206240" y="2276856"/>
+            <a:ext cx="640080" cy="0"/>
+          </a:xfrm>
+          <a:prstGeom prst="line">
+            <a:avLst/>
+          </a:prstGeom>
+          <a:noFill/>
+          <a:ln w="12700">
+            <a:solidFill>
+              <a:srgbClr val="718096"/>
+            </a:solidFill>
+            <a:prstDash val="solid"/>
+          </a:ln>
+        </p:spPr>
+        <p:txBody>
+          <a:bodyPr/>
+          <a:lstStyle/>
+          <a:p>
+            <a:endParaRPr lang="en-US"/>
           </a:p>
         </p:txBody>
       </p:sp>
@@ -9281,7 +9179,7 @@
                   <a:srgbClr val="276749"/>
                 </a:solidFill>
               </a:rPr>
-              <a:t>✓  GenAI clinical intel processing with evidence base</a:t>
+              <a:t>[&gt;] GenAI clinical intel processing with evidence base</a:t>
             </a:r>
             <a:endParaRPr lang="en-US" sz="900" dirty="0"/>
           </a:p>
@@ -9349,7 +9247,7 @@
                   <a:srgbClr val="742A2A"/>
                 </a:solidFill>
               </a:rPr>
-              <a:t>✗  Manual template selection (300+ options)</a:t>
+              <a:t>[X] Manual template selection (300+ options)</a:t>
             </a:r>
             <a:endParaRPr lang="en-US" sz="900" dirty="0"/>
           </a:p>
@@ -9357,37 +9255,31 @@
       </p:sp>
       <p:sp>
         <p:nvSpPr>
-          <p:cNvPr id="31" name="Text 29"/>
-          <p:cNvSpPr/>
-          <p:nvPr/>
-        </p:nvSpPr>
-        <p:spPr>
-          <a:xfrm>
-            <a:off x="4133088" y="2468880"/>
-            <a:ext cx="868680" cy="310896"/>
-          </a:xfrm>
-          <a:prstGeom prst="rect">
-            <a:avLst/>
-          </a:prstGeom>
-          <a:noFill/>
-          <a:ln/>
-        </p:spPr>
-        <p:txBody>
-          <a:bodyPr wrap="square" rtlCol="0" anchor="ctr"/>
-          <a:lstStyle/>
-          <a:p>
-            <a:pPr marL="0" indent="0" algn="ctr">
-              <a:buNone/>
-            </a:pPr>
-            <a:r>
-              <a:rPr lang="en-US" sz="1200" dirty="0">
-                <a:solidFill>
-                  <a:srgbClr val="718096"/>
-                </a:solidFill>
-              </a:rPr>
-              <a:t>→</a:t>
-            </a:r>
-            <a:endParaRPr lang="en-US" sz="1200" dirty="0"/>
+          <p:cNvPr id="31" name="Shape 29"/>
+          <p:cNvSpPr/>
+          <p:nvPr/>
+        </p:nvSpPr>
+        <p:spPr>
+          <a:xfrm>
+            <a:off x="4206240" y="2624328"/>
+            <a:ext cx="640080" cy="0"/>
+          </a:xfrm>
+          <a:prstGeom prst="line">
+            <a:avLst/>
+          </a:prstGeom>
+          <a:noFill/>
+          <a:ln w="12700">
+            <a:solidFill>
+              <a:srgbClr val="718096"/>
+            </a:solidFill>
+            <a:prstDash val="solid"/>
+          </a:ln>
+        </p:spPr>
+        <p:txBody>
+          <a:bodyPr/>
+          <a:lstStyle/>
+          <a:p>
+            <a:endParaRPr lang="en-US"/>
           </a:p>
         </p:txBody>
       </p:sp>
@@ -9453,7 +9345,7 @@
                   <a:srgbClr val="276749"/>
                 </a:solidFill>
               </a:rPr>
-              <a:t>✓  LLM auto-selects template &amp; drafts recommendation</a:t>
+              <a:t>[&gt;] LLM auto-selects template &amp; drafts recommendation</a:t>
             </a:r>
             <a:endParaRPr lang="en-US" sz="900" dirty="0"/>
           </a:p>
@@ -9521,7 +9413,7 @@
                   <a:srgbClr val="742A2A"/>
                 </a:solidFill>
               </a:rPr>
-              <a:t>✗  Double documentation (EHR + consulting SW)</a:t>
+              <a:t>[X] Double documentation (EHR + consulting SW)</a:t>
             </a:r>
             <a:endParaRPr lang="en-US" sz="900" dirty="0"/>
           </a:p>
@@ -9529,37 +9421,31 @@
       </p:sp>
       <p:sp>
         <p:nvSpPr>
-          <p:cNvPr id="36" name="Text 34"/>
-          <p:cNvSpPr/>
-          <p:nvPr/>
-        </p:nvSpPr>
-        <p:spPr>
-          <a:xfrm>
-            <a:off x="4133088" y="2816352"/>
-            <a:ext cx="868680" cy="310896"/>
-          </a:xfrm>
-          <a:prstGeom prst="rect">
-            <a:avLst/>
-          </a:prstGeom>
-          <a:noFill/>
-          <a:ln/>
-        </p:spPr>
-        <p:txBody>
-          <a:bodyPr wrap="square" rtlCol="0" anchor="ctr"/>
-          <a:lstStyle/>
-          <a:p>
-            <a:pPr marL="0" indent="0" algn="ctr">
-              <a:buNone/>
-            </a:pPr>
-            <a:r>
-              <a:rPr lang="en-US" sz="1200" dirty="0">
-                <a:solidFill>
-                  <a:srgbClr val="718096"/>
-                </a:solidFill>
-              </a:rPr>
-              <a:t>→</a:t>
-            </a:r>
-            <a:endParaRPr lang="en-US" sz="1200" dirty="0"/>
+          <p:cNvPr id="36" name="Shape 34"/>
+          <p:cNvSpPr/>
+          <p:nvPr/>
+        </p:nvSpPr>
+        <p:spPr>
+          <a:xfrm>
+            <a:off x="4206240" y="2971800"/>
+            <a:ext cx="640080" cy="0"/>
+          </a:xfrm>
+          <a:prstGeom prst="line">
+            <a:avLst/>
+          </a:prstGeom>
+          <a:noFill/>
+          <a:ln w="12700">
+            <a:solidFill>
+              <a:srgbClr val="718096"/>
+            </a:solidFill>
+            <a:prstDash val="solid"/>
+          </a:ln>
+        </p:spPr>
+        <p:txBody>
+          <a:bodyPr/>
+          <a:lstStyle/>
+          <a:p>
+            <a:endParaRPr lang="en-US"/>
           </a:p>
         </p:txBody>
       </p:sp>
@@ -9625,7 +9511,7 @@
                   <a:srgbClr val="276749"/>
                 </a:solidFill>
               </a:rPr>
-              <a:t>✓  Single-source documentation with auto EHR write</a:t>
+              <a:t>[&gt;] Single-source documentation with auto EHR write</a:t>
             </a:r>
             <a:endParaRPr lang="en-US" sz="900" dirty="0"/>
           </a:p>
@@ -9693,7 +9579,7 @@
                   <a:srgbClr val="742A2A"/>
                 </a:solidFill>
               </a:rPr>
-              <a:t>✗  Manual drug interaction lookup</a:t>
+              <a:t>[X] Manual drug interaction lookup</a:t>
             </a:r>
             <a:endParaRPr lang="en-US" sz="900" dirty="0"/>
           </a:p>
@@ -9701,37 +9587,31 @@
       </p:sp>
       <p:sp>
         <p:nvSpPr>
-          <p:cNvPr id="41" name="Text 39"/>
-          <p:cNvSpPr/>
-          <p:nvPr/>
-        </p:nvSpPr>
-        <p:spPr>
-          <a:xfrm>
-            <a:off x="4133088" y="3163824"/>
-            <a:ext cx="868680" cy="310896"/>
-          </a:xfrm>
-          <a:prstGeom prst="rect">
-            <a:avLst/>
-          </a:prstGeom>
-          <a:noFill/>
-          <a:ln/>
-        </p:spPr>
-        <p:txBody>
-          <a:bodyPr wrap="square" rtlCol="0" anchor="ctr"/>
-          <a:lstStyle/>
-          <a:p>
-            <a:pPr marL="0" indent="0" algn="ctr">
-              <a:buNone/>
-            </a:pPr>
-            <a:r>
-              <a:rPr lang="en-US" sz="1200" dirty="0">
-                <a:solidFill>
-                  <a:srgbClr val="718096"/>
-                </a:solidFill>
-              </a:rPr>
-              <a:t>→</a:t>
-            </a:r>
-            <a:endParaRPr lang="en-US" sz="1200" dirty="0"/>
+          <p:cNvPr id="41" name="Shape 39"/>
+          <p:cNvSpPr/>
+          <p:nvPr/>
+        </p:nvSpPr>
+        <p:spPr>
+          <a:xfrm>
+            <a:off x="4206240" y="3319272"/>
+            <a:ext cx="640080" cy="0"/>
+          </a:xfrm>
+          <a:prstGeom prst="line">
+            <a:avLst/>
+          </a:prstGeom>
+          <a:noFill/>
+          <a:ln w="12700">
+            <a:solidFill>
+              <a:srgbClr val="718096"/>
+            </a:solidFill>
+            <a:prstDash val="solid"/>
+          </a:ln>
+        </p:spPr>
+        <p:txBody>
+          <a:bodyPr/>
+          <a:lstStyle/>
+          <a:p>
+            <a:endParaRPr lang="en-US"/>
           </a:p>
         </p:txBody>
       </p:sp>
@@ -9797,7 +9677,7 @@
                   <a:srgbClr val="276749"/>
                 </a:solidFill>
               </a:rPr>
-              <a:t>✓  Real-time First DataBank / Medispan integration</a:t>
+              <a:t>[&gt;] Real-time First DataBank / Medispan integration</a:t>
             </a:r>
             <a:endParaRPr lang="en-US" sz="900" dirty="0"/>
           </a:p>
@@ -9865,7 +9745,7 @@
                   <a:srgbClr val="742A2A"/>
                 </a:solidFill>
               </a:rPr>
-              <a:t>✗  Manual irregularity report creation</a:t>
+              <a:t>[X] Manual irregularity report creation</a:t>
             </a:r>
             <a:endParaRPr lang="en-US" sz="900" dirty="0"/>
           </a:p>
@@ -9873,37 +9753,31 @@
       </p:sp>
       <p:sp>
         <p:nvSpPr>
-          <p:cNvPr id="46" name="Text 44"/>
-          <p:cNvSpPr/>
-          <p:nvPr/>
-        </p:nvSpPr>
-        <p:spPr>
-          <a:xfrm>
-            <a:off x="4133088" y="3511296"/>
-            <a:ext cx="868680" cy="310896"/>
-          </a:xfrm>
-          <a:prstGeom prst="rect">
-            <a:avLst/>
-          </a:prstGeom>
-          <a:noFill/>
-          <a:ln/>
-        </p:spPr>
-        <p:txBody>
-          <a:bodyPr wrap="square" rtlCol="0" anchor="ctr"/>
-          <a:lstStyle/>
-          <a:p>
-            <a:pPr marL="0" indent="0" algn="ctr">
-              <a:buNone/>
-            </a:pPr>
-            <a:r>
-              <a:rPr lang="en-US" sz="1200" dirty="0">
-                <a:solidFill>
-                  <a:srgbClr val="718096"/>
-                </a:solidFill>
-              </a:rPr>
-              <a:t>→</a:t>
-            </a:r>
-            <a:endParaRPr lang="en-US" sz="1200" dirty="0"/>
+          <p:cNvPr id="46" name="Shape 44"/>
+          <p:cNvSpPr/>
+          <p:nvPr/>
+        </p:nvSpPr>
+        <p:spPr>
+          <a:xfrm>
+            <a:off x="4206240" y="3666744"/>
+            <a:ext cx="640080" cy="0"/>
+          </a:xfrm>
+          <a:prstGeom prst="line">
+            <a:avLst/>
+          </a:prstGeom>
+          <a:noFill/>
+          <a:ln w="12700">
+            <a:solidFill>
+              <a:srgbClr val="718096"/>
+            </a:solidFill>
+            <a:prstDash val="solid"/>
+          </a:ln>
+        </p:spPr>
+        <p:txBody>
+          <a:bodyPr/>
+          <a:lstStyle/>
+          <a:p>
+            <a:endParaRPr lang="en-US"/>
           </a:p>
         </p:txBody>
       </p:sp>
@@ -9969,7 +9843,7 @@
                   <a:srgbClr val="276749"/>
                 </a:solidFill>
               </a:rPr>
-              <a:t>✓  Auto-generated F756 report with routing</a:t>
+              <a:t>[&gt;] Auto-generated F756 report with routing</a:t>
             </a:r>
             <a:endParaRPr lang="en-US" sz="900" dirty="0"/>
           </a:p>
@@ -10037,7 +9911,7 @@
                   <a:srgbClr val="742A2A"/>
                 </a:solidFill>
               </a:rPr>
-              <a:t>✗  No SLA tracking for physician responses</a:t>
+              <a:t>[X] No SLA tracking for physician responses</a:t>
             </a:r>
             <a:endParaRPr lang="en-US" sz="900" dirty="0"/>
           </a:p>
@@ -10045,37 +9919,31 @@
       </p:sp>
       <p:sp>
         <p:nvSpPr>
-          <p:cNvPr id="51" name="Text 49"/>
-          <p:cNvSpPr/>
-          <p:nvPr/>
-        </p:nvSpPr>
-        <p:spPr>
-          <a:xfrm>
-            <a:off x="4133088" y="3858768"/>
-            <a:ext cx="868680" cy="310896"/>
-          </a:xfrm>
-          <a:prstGeom prst="rect">
-            <a:avLst/>
-          </a:prstGeom>
-          <a:noFill/>
-          <a:ln/>
-        </p:spPr>
-        <p:txBody>
-          <a:bodyPr wrap="square" rtlCol="0" anchor="ctr"/>
-          <a:lstStyle/>
-          <a:p>
-            <a:pPr marL="0" indent="0" algn="ctr">
-              <a:buNone/>
-            </a:pPr>
-            <a:r>
-              <a:rPr lang="en-US" sz="1200" dirty="0">
-                <a:solidFill>
-                  <a:srgbClr val="718096"/>
-                </a:solidFill>
-              </a:rPr>
-              <a:t>→</a:t>
-            </a:r>
-            <a:endParaRPr lang="en-US" sz="1200" dirty="0"/>
+          <p:cNvPr id="51" name="Shape 49"/>
+          <p:cNvSpPr/>
+          <p:nvPr/>
+        </p:nvSpPr>
+        <p:spPr>
+          <a:xfrm>
+            <a:off x="4206240" y="4014216"/>
+            <a:ext cx="640080" cy="0"/>
+          </a:xfrm>
+          <a:prstGeom prst="line">
+            <a:avLst/>
+          </a:prstGeom>
+          <a:noFill/>
+          <a:ln w="12700">
+            <a:solidFill>
+              <a:srgbClr val="718096"/>
+            </a:solidFill>
+            <a:prstDash val="solid"/>
+          </a:ln>
+        </p:spPr>
+        <p:txBody>
+          <a:bodyPr/>
+          <a:lstStyle/>
+          <a:p>
+            <a:endParaRPr lang="en-US"/>
           </a:p>
         </p:txBody>
       </p:sp>
@@ -10141,7 +10009,7 @@
                   <a:srgbClr val="276749"/>
                 </a:solidFill>
               </a:rPr>
-              <a:t>✓  Automated SLA: urgent (24h), standard (30 days)</a:t>
+              <a:t>[&gt;] Automated SLA: urgent (24h), standard (30 days)</a:t>
             </a:r>
             <a:endParaRPr lang="en-US" sz="900" dirty="0"/>
           </a:p>
@@ -10209,7 +10077,7 @@
                   <a:srgbClr val="742A2A"/>
                 </a:solidFill>
               </a:rPr>
-              <a:t>✗  Manual monthly CMS summary report</a:t>
+              <a:t>[X] Manual monthly CMS summary report</a:t>
             </a:r>
             <a:endParaRPr lang="en-US" sz="900" dirty="0"/>
           </a:p>
@@ -10217,37 +10085,31 @@
       </p:sp>
       <p:sp>
         <p:nvSpPr>
-          <p:cNvPr id="56" name="Text 54"/>
-          <p:cNvSpPr/>
-          <p:nvPr/>
-        </p:nvSpPr>
-        <p:spPr>
-          <a:xfrm>
-            <a:off x="4133088" y="4206240"/>
-            <a:ext cx="868680" cy="310896"/>
-          </a:xfrm>
-          <a:prstGeom prst="rect">
-            <a:avLst/>
-          </a:prstGeom>
-          <a:noFill/>
-          <a:ln/>
-        </p:spPr>
-        <p:txBody>
-          <a:bodyPr wrap="square" rtlCol="0" anchor="ctr"/>
-          <a:lstStyle/>
-          <a:p>
-            <a:pPr marL="0" indent="0" algn="ctr">
-              <a:buNone/>
-            </a:pPr>
-            <a:r>
-              <a:rPr lang="en-US" sz="1200" dirty="0">
-                <a:solidFill>
-                  <a:srgbClr val="718096"/>
-                </a:solidFill>
-              </a:rPr>
-              <a:t>→</a:t>
-            </a:r>
-            <a:endParaRPr lang="en-US" sz="1200" dirty="0"/>
+          <p:cNvPr id="56" name="Shape 54"/>
+          <p:cNvSpPr/>
+          <p:nvPr/>
+        </p:nvSpPr>
+        <p:spPr>
+          <a:xfrm>
+            <a:off x="4206240" y="4361688"/>
+            <a:ext cx="640080" cy="0"/>
+          </a:xfrm>
+          <a:prstGeom prst="line">
+            <a:avLst/>
+          </a:prstGeom>
+          <a:noFill/>
+          <a:ln w="12700">
+            <a:solidFill>
+              <a:srgbClr val="718096"/>
+            </a:solidFill>
+            <a:prstDash val="solid"/>
+          </a:ln>
+        </p:spPr>
+        <p:txBody>
+          <a:bodyPr/>
+          <a:lstStyle/>
+          <a:p>
+            <a:endParaRPr lang="en-US"/>
           </a:p>
         </p:txBody>
       </p:sp>
@@ -10313,7 +10175,7 @@
                   <a:srgbClr val="276749"/>
                 </a:solidFill>
               </a:rPr>
-              <a:t>✓  BI-driven auto-generated compliance reports</a:t>
+              <a:t>[&gt;] BI-driven auto-generated compliance reports</a:t>
             </a:r>
             <a:endParaRPr lang="en-US" sz="900" dirty="0"/>
           </a:p>
@@ -10690,7 +10552,7 @@
                   <a:srgbClr val="2D3748"/>
                 </a:solidFill>
               </a:rPr>
-              <a:t>⏱  0–6 Months</a:t>
+              <a:t>0–6 Months</a:t>
             </a:r>
             <a:endParaRPr lang="en-US" sz="900" dirty="0"/>
           </a:p>
@@ -10758,7 +10620,7 @@
                   <a:srgbClr val="2D3748"/>
                 </a:solidFill>
               </a:rPr>
-              <a:t>• PCC data ingestion via FHIR/API</a:t>
+              <a:t>- PCC data ingestion via FHIR/API</a:t>
             </a:r>
             <a:endParaRPr lang="en-US" sz="900" dirty="0"/>
           </a:p>
@@ -10826,7 +10688,7 @@
                   <a:srgbClr val="2D3748"/>
                 </a:solidFill>
               </a:rPr>
-              <a:t>• AI clinical review engine (GenAI)</a:t>
+              <a:t>- AI clinical review engine (GenAI)</a:t>
             </a:r>
             <a:endParaRPr lang="en-US" sz="900" dirty="0"/>
           </a:p>
@@ -10894,7 +10756,7 @@
                   <a:srgbClr val="2D3748"/>
                 </a:solidFill>
               </a:rPr>
-              <a:t>• LLM recommendation generation</a:t>
+              <a:t>- LLM recommendation generation</a:t>
             </a:r>
             <a:endParaRPr lang="en-US" sz="900" dirty="0"/>
           </a:p>
@@ -10962,7 +10824,7 @@
                   <a:srgbClr val="2D3748"/>
                 </a:solidFill>
               </a:rPr>
-              <a:t>• Pharmacist approval interface (HITL)</a:t>
+              <a:t>- Pharmacist approval interface (HITL)</a:t>
             </a:r>
             <a:endParaRPr lang="en-US" sz="900" dirty="0"/>
           </a:p>
@@ -11030,7 +10892,7 @@
                   <a:srgbClr val="2D3748"/>
                 </a:solidFill>
               </a:rPr>
-              <a:t>• Patient-level MRR recommendation reports</a:t>
+              <a:t>- Patient-level MRR recommendation reports</a:t>
             </a:r>
             <a:endParaRPr lang="en-US" sz="900" dirty="0"/>
           </a:p>
@@ -11098,7 +10960,7 @@
                   <a:srgbClr val="2D3748"/>
                 </a:solidFill>
               </a:rPr>
-              <a:t>• Basic irregularity routing to MD / DON</a:t>
+              <a:t>- Basic irregularity routing to MD / DON</a:t>
             </a:r>
             <a:endParaRPr lang="en-US" sz="900" dirty="0"/>
           </a:p>
@@ -11166,7 +11028,7 @@
                   <a:srgbClr val="2D3748"/>
                 </a:solidFill>
               </a:rPr>
-              <a:t>• Medication reconciliation flagging (admits)</a:t>
+              <a:t>- Medication reconciliation flagging (admits)</a:t>
             </a:r>
             <a:endParaRPr lang="en-US" sz="900" dirty="0"/>
           </a:p>
@@ -11338,7 +11200,7 @@
                   <a:srgbClr val="2D3748"/>
                 </a:solidFill>
               </a:rPr>
-              <a:t>⏱  6–12 Months</a:t>
+              <a:t>6–12 Months</a:t>
             </a:r>
             <a:endParaRPr lang="en-US" sz="900" dirty="0"/>
           </a:p>
@@ -11406,7 +11268,7 @@
                   <a:srgbClr val="2D3748"/>
                 </a:solidFill>
               </a:rPr>
-              <a:t>• First DataBank / Medispan integration</a:t>
+              <a:t>- First DataBank / Medispan integration</a:t>
             </a:r>
             <a:endParaRPr lang="en-US" sz="900" dirty="0"/>
           </a:p>
@@ -11474,7 +11336,7 @@
                   <a:srgbClr val="2D3748"/>
                 </a:solidFill>
               </a:rPr>
-              <a:t>• Monthly CMS facility summary report</a:t>
+              <a:t>- Monthly CMS facility summary report</a:t>
             </a:r>
             <a:endParaRPr lang="en-US" sz="900" dirty="0"/>
           </a:p>
@@ -11542,7 +11404,7 @@
                   <a:srgbClr val="2D3748"/>
                 </a:solidFill>
               </a:rPr>
-              <a:t>• F756 SLA tracking &amp; compliance dashboard</a:t>
+              <a:t>- F756 SLA tracking &amp; compliance dashboard</a:t>
             </a:r>
             <a:endParaRPr lang="en-US" sz="900" dirty="0"/>
           </a:p>
@@ -11610,7 +11472,7 @@
                   <a:srgbClr val="2D3748"/>
                 </a:solidFill>
               </a:rPr>
-              <a:t>• Physician response portal (external screens)</a:t>
+              <a:t>- Physician response portal (external screens)</a:t>
             </a:r>
             <a:endParaRPr lang="en-US" sz="900" dirty="0"/>
           </a:p>
@@ -11678,7 +11540,7 @@
                   <a:srgbClr val="2D3748"/>
                 </a:solidFill>
               </a:rPr>
-              <a:t>• Epic / Surescripts integration</a:t>
+              <a:t>- Epic / Surescripts integration</a:t>
             </a:r>
             <a:endParaRPr lang="en-US" sz="900" dirty="0"/>
           </a:p>
@@ -11746,7 +11608,7 @@
                   <a:srgbClr val="2D3748"/>
                 </a:solidFill>
               </a:rPr>
-              <a:t>• Automated escalation for urgent items</a:t>
+              <a:t>- Automated escalation for urgent items</a:t>
             </a:r>
             <a:endParaRPr lang="en-US" sz="900" dirty="0"/>
           </a:p>
@@ -11814,7 +11676,7 @@
                   <a:srgbClr val="2D3748"/>
                 </a:solidFill>
               </a:rPr>
-              <a:t>• Multi-EHR support (MatrixCare etc.)</a:t>
+              <a:t>- Multi-EHR support (MatrixCare etc.)</a:t>
             </a:r>
             <a:endParaRPr lang="en-US" sz="900" dirty="0"/>
           </a:p>
@@ -11986,7 +11848,7 @@
                   <a:srgbClr val="2D3748"/>
                 </a:solidFill>
               </a:rPr>
-              <a:t>⏱  12–18 Months</a:t>
+              <a:t>12–18 Months</a:t>
             </a:r>
             <a:endParaRPr lang="en-US" sz="900" dirty="0"/>
           </a:p>
@@ -12054,7 +11916,7 @@
                   <a:srgbClr val="2D3748"/>
                 </a:solidFill>
               </a:rPr>
-              <a:t>• Predictive medication risk scoring</a:t>
+              <a:t>- Predictive medication risk scoring</a:t>
             </a:r>
             <a:endParaRPr lang="en-US" sz="900" dirty="0"/>
           </a:p>
@@ -12122,7 +11984,7 @@
                   <a:srgbClr val="2D3748"/>
                 </a:solidFill>
               </a:rPr>
-              <a:t>• Population analytics &amp; insights</a:t>
+              <a:t>- Population analytics &amp; insights</a:t>
             </a:r>
             <a:endParaRPr lang="en-US" sz="900" dirty="0"/>
           </a:p>
@@ -12190,7 +12052,7 @@
                   <a:srgbClr val="2D3748"/>
                 </a:solidFill>
               </a:rPr>
-              <a:t>• Automated intervention prioritization</a:t>
+              <a:t>- Automated intervention prioritization</a:t>
             </a:r>
             <a:endParaRPr lang="en-US" sz="900" dirty="0"/>
           </a:p>
@@ -12258,7 +12120,7 @@
                   <a:srgbClr val="2D3748"/>
                 </a:solidFill>
               </a:rPr>
-              <a:t>• Provider direct messaging integration</a:t>
+              <a:t>- Provider direct messaging integration</a:t>
             </a:r>
             <a:endParaRPr lang="en-US" sz="900" dirty="0"/>
           </a:p>
@@ -12326,7 +12188,7 @@
                   <a:srgbClr val="2D3748"/>
                 </a:solidFill>
               </a:rPr>
-              <a:t>• AI-powered new admission reconciliation</a:t>
+              <a:t>- AI-powered new admission reconciliation</a:t>
             </a:r>
             <a:endParaRPr lang="en-US" sz="900" dirty="0"/>
           </a:p>
@@ -12394,7 +12256,7 @@
                   <a:srgbClr val="2D3748"/>
                 </a:solidFill>
               </a:rPr>
-              <a:t>• RPA for full workflow automation</a:t>
+              <a:t>- RPA for full workflow automation</a:t>
             </a:r>
             <a:endParaRPr lang="en-US" sz="900" dirty="0"/>
           </a:p>
@@ -12462,7 +12324,7 @@
                   <a:srgbClr val="2D3748"/>
                 </a:solidFill>
               </a:rPr>
-              <a:t>• BI dashboards &amp; workload analytics</a:t>
+              <a:t>- BI dashboards &amp; workload analytics</a:t>
             </a:r>
             <a:endParaRPr lang="en-US" sz="900" dirty="0"/>
           </a:p>
@@ -14731,7 +14593,7 @@
                   <a:srgbClr val="718096"/>
                 </a:solidFill>
               </a:rPr>
-              <a:t>3-phase approach: MVP → Integration → Intelligence</a:t>
+              <a:t>3-phase approach: MVP &gt;&gt; Integration &gt;&gt; Intelligence</a:t>
             </a:r>
             <a:endParaRPr lang="en-US" sz="850" dirty="0"/>
           </a:p>
@@ -15883,37 +15745,31 @@
       </p:sp>
       <p:sp>
         <p:nvSpPr>
-          <p:cNvPr id="6" name="Text 4"/>
-          <p:cNvSpPr/>
-          <p:nvPr/>
-        </p:nvSpPr>
-        <p:spPr>
-          <a:xfrm>
-            <a:off x="1737360" y="877824"/>
-            <a:ext cx="256032" cy="457200"/>
-          </a:xfrm>
-          <a:prstGeom prst="rect">
-            <a:avLst/>
-          </a:prstGeom>
-          <a:noFill/>
-          <a:ln/>
-        </p:spPr>
-        <p:txBody>
-          <a:bodyPr wrap="square" rtlCol="0" anchor="ctr"/>
-          <a:lstStyle/>
-          <a:p>
-            <a:pPr marL="0" indent="0" algn="ctr">
-              <a:buNone/>
-            </a:pPr>
-            <a:r>
-              <a:rPr lang="en-US" sz="1400" dirty="0">
-                <a:solidFill>
-                  <a:srgbClr val="718096"/>
-                </a:solidFill>
-              </a:rPr>
-              <a:t>→</a:t>
-            </a:r>
-            <a:endParaRPr lang="en-US" sz="1400" dirty="0"/>
+          <p:cNvPr id="6" name="Shape 4"/>
+          <p:cNvSpPr/>
+          <p:nvPr/>
+        </p:nvSpPr>
+        <p:spPr>
+          <a:xfrm>
+            <a:off x="1737360" y="1097280"/>
+            <a:ext cx="256032" cy="0"/>
+          </a:xfrm>
+          <a:prstGeom prst="line">
+            <a:avLst/>
+          </a:prstGeom>
+          <a:noFill/>
+          <a:ln w="19050">
+            <a:solidFill>
+              <a:srgbClr val="718096"/>
+            </a:solidFill>
+            <a:prstDash val="solid"/>
+          </a:ln>
+        </p:spPr>
+        <p:txBody>
+          <a:bodyPr/>
+          <a:lstStyle/>
+          <a:p>
+            <a:endParaRPr lang="en-US"/>
           </a:p>
         </p:txBody>
       </p:sp>
@@ -16015,37 +15871,31 @@
       </p:sp>
       <p:sp>
         <p:nvSpPr>
-          <p:cNvPr id="9" name="Text 7"/>
-          <p:cNvSpPr/>
-          <p:nvPr/>
-        </p:nvSpPr>
-        <p:spPr>
-          <a:xfrm>
-            <a:off x="3529584" y="877824"/>
-            <a:ext cx="256032" cy="457200"/>
-          </a:xfrm>
-          <a:prstGeom prst="rect">
-            <a:avLst/>
-          </a:prstGeom>
-          <a:noFill/>
-          <a:ln/>
-        </p:spPr>
-        <p:txBody>
-          <a:bodyPr wrap="square" rtlCol="0" anchor="ctr"/>
-          <a:lstStyle/>
-          <a:p>
-            <a:pPr marL="0" indent="0" algn="ctr">
-              <a:buNone/>
-            </a:pPr>
-            <a:r>
-              <a:rPr lang="en-US" sz="1400" dirty="0">
-                <a:solidFill>
-                  <a:srgbClr val="718096"/>
-                </a:solidFill>
-              </a:rPr>
-              <a:t>→</a:t>
-            </a:r>
-            <a:endParaRPr lang="en-US" sz="1400" dirty="0"/>
+          <p:cNvPr id="9" name="Shape 7"/>
+          <p:cNvSpPr/>
+          <p:nvPr/>
+        </p:nvSpPr>
+        <p:spPr>
+          <a:xfrm>
+            <a:off x="3529584" y="1097280"/>
+            <a:ext cx="256032" cy="0"/>
+          </a:xfrm>
+          <a:prstGeom prst="line">
+            <a:avLst/>
+          </a:prstGeom>
+          <a:noFill/>
+          <a:ln w="19050">
+            <a:solidFill>
+              <a:srgbClr val="718096"/>
+            </a:solidFill>
+            <a:prstDash val="solid"/>
+          </a:ln>
+        </p:spPr>
+        <p:txBody>
+          <a:bodyPr/>
+          <a:lstStyle/>
+          <a:p>
+            <a:endParaRPr lang="en-US"/>
           </a:p>
         </p:txBody>
       </p:sp>
@@ -16147,37 +15997,31 @@
       </p:sp>
       <p:sp>
         <p:nvSpPr>
-          <p:cNvPr id="12" name="Text 10"/>
-          <p:cNvSpPr/>
-          <p:nvPr/>
-        </p:nvSpPr>
-        <p:spPr>
-          <a:xfrm>
-            <a:off x="5321808" y="877824"/>
-            <a:ext cx="256032" cy="457200"/>
-          </a:xfrm>
-          <a:prstGeom prst="rect">
-            <a:avLst/>
-          </a:prstGeom>
-          <a:noFill/>
-          <a:ln/>
-        </p:spPr>
-        <p:txBody>
-          <a:bodyPr wrap="square" rtlCol="0" anchor="ctr"/>
-          <a:lstStyle/>
-          <a:p>
-            <a:pPr marL="0" indent="0" algn="ctr">
-              <a:buNone/>
-            </a:pPr>
-            <a:r>
-              <a:rPr lang="en-US" sz="1400" dirty="0">
-                <a:solidFill>
-                  <a:srgbClr val="718096"/>
-                </a:solidFill>
-              </a:rPr>
-              <a:t>→</a:t>
-            </a:r>
-            <a:endParaRPr lang="en-US" sz="1400" dirty="0"/>
+          <p:cNvPr id="12" name="Shape 10"/>
+          <p:cNvSpPr/>
+          <p:nvPr/>
+        </p:nvSpPr>
+        <p:spPr>
+          <a:xfrm>
+            <a:off x="5321808" y="1097280"/>
+            <a:ext cx="256032" cy="0"/>
+          </a:xfrm>
+          <a:prstGeom prst="line">
+            <a:avLst/>
+          </a:prstGeom>
+          <a:noFill/>
+          <a:ln w="19050">
+            <a:solidFill>
+              <a:srgbClr val="718096"/>
+            </a:solidFill>
+            <a:prstDash val="solid"/>
+          </a:ln>
+        </p:spPr>
+        <p:txBody>
+          <a:bodyPr/>
+          <a:lstStyle/>
+          <a:p>
+            <a:endParaRPr lang="en-US"/>
           </a:p>
         </p:txBody>
       </p:sp>
@@ -16279,37 +16123,31 @@
       </p:sp>
       <p:sp>
         <p:nvSpPr>
-          <p:cNvPr id="15" name="Text 13"/>
-          <p:cNvSpPr/>
-          <p:nvPr/>
-        </p:nvSpPr>
-        <p:spPr>
-          <a:xfrm>
-            <a:off x="7114032" y="877824"/>
-            <a:ext cx="256032" cy="457200"/>
-          </a:xfrm>
-          <a:prstGeom prst="rect">
-            <a:avLst/>
-          </a:prstGeom>
-          <a:noFill/>
-          <a:ln/>
-        </p:spPr>
-        <p:txBody>
-          <a:bodyPr wrap="square" rtlCol="0" anchor="ctr"/>
-          <a:lstStyle/>
-          <a:p>
-            <a:pPr marL="0" indent="0" algn="ctr">
-              <a:buNone/>
-            </a:pPr>
-            <a:r>
-              <a:rPr lang="en-US" sz="1400" dirty="0">
-                <a:solidFill>
-                  <a:srgbClr val="718096"/>
-                </a:solidFill>
-              </a:rPr>
-              <a:t>→</a:t>
-            </a:r>
-            <a:endParaRPr lang="en-US" sz="1400" dirty="0"/>
+          <p:cNvPr id="15" name="Shape 13"/>
+          <p:cNvSpPr/>
+          <p:nvPr/>
+        </p:nvSpPr>
+        <p:spPr>
+          <a:xfrm>
+            <a:off x="7114032" y="1097280"/>
+            <a:ext cx="256032" cy="0"/>
+          </a:xfrm>
+          <a:prstGeom prst="line">
+            <a:avLst/>
+          </a:prstGeom>
+          <a:noFill/>
+          <a:ln w="19050">
+            <a:solidFill>
+              <a:srgbClr val="718096"/>
+            </a:solidFill>
+            <a:prstDash val="solid"/>
+          </a:ln>
+        </p:spPr>
+        <p:txBody>
+          <a:bodyPr/>
+          <a:lstStyle/>
+          <a:p>
+            <a:endParaRPr lang="en-US"/>
           </a:p>
         </p:txBody>
       </p:sp>
@@ -16411,37 +16249,31 @@
       </p:sp>
       <p:sp>
         <p:nvSpPr>
-          <p:cNvPr id="18" name="Text 16"/>
-          <p:cNvSpPr/>
-          <p:nvPr/>
-        </p:nvSpPr>
-        <p:spPr>
-          <a:xfrm>
-            <a:off x="7891272" y="1435608"/>
-            <a:ext cx="457200" cy="256032"/>
-          </a:xfrm>
-          <a:prstGeom prst="rect">
-            <a:avLst/>
-          </a:prstGeom>
-          <a:noFill/>
-          <a:ln/>
-        </p:spPr>
-        <p:txBody>
-          <a:bodyPr wrap="square" rtlCol="0" anchor="ctr"/>
-          <a:lstStyle/>
-          <a:p>
-            <a:pPr marL="0" indent="0" algn="ctr">
-              <a:buNone/>
-            </a:pPr>
-            <a:r>
-              <a:rPr lang="en-US" sz="1400" dirty="0">
-                <a:solidFill>
-                  <a:srgbClr val="718096"/>
-                </a:solidFill>
-              </a:rPr>
-              <a:t>↓</a:t>
-            </a:r>
-            <a:endParaRPr lang="en-US" sz="1400" dirty="0"/>
+          <p:cNvPr id="18" name="Shape 16"/>
+          <p:cNvSpPr/>
+          <p:nvPr/>
+        </p:nvSpPr>
+        <p:spPr>
+          <a:xfrm>
+            <a:off x="8110728" y="1435608"/>
+            <a:ext cx="0" cy="256032"/>
+          </a:xfrm>
+          <a:prstGeom prst="line">
+            <a:avLst/>
+          </a:prstGeom>
+          <a:noFill/>
+          <a:ln w="19050">
+            <a:solidFill>
+              <a:srgbClr val="718096"/>
+            </a:solidFill>
+            <a:prstDash val="solid"/>
+          </a:ln>
+        </p:spPr>
+        <p:txBody>
+          <a:bodyPr/>
+          <a:lstStyle/>
+          <a:p>
+            <a:endParaRPr lang="en-US"/>
           </a:p>
         </p:txBody>
       </p:sp>
@@ -16543,37 +16375,31 @@
       </p:sp>
       <p:sp>
         <p:nvSpPr>
-          <p:cNvPr id="21" name="Text 19"/>
-          <p:cNvSpPr/>
-          <p:nvPr/>
-        </p:nvSpPr>
-        <p:spPr>
-          <a:xfrm>
-            <a:off x="1737360" y="1911096"/>
-            <a:ext cx="256032" cy="457200"/>
-          </a:xfrm>
-          <a:prstGeom prst="rect">
-            <a:avLst/>
-          </a:prstGeom>
-          <a:noFill/>
-          <a:ln/>
-        </p:spPr>
-        <p:txBody>
-          <a:bodyPr wrap="square" rtlCol="0" anchor="ctr"/>
-          <a:lstStyle/>
-          <a:p>
-            <a:pPr marL="0" indent="0" algn="ctr">
-              <a:buNone/>
-            </a:pPr>
-            <a:r>
-              <a:rPr lang="en-US" sz="1400" dirty="0">
-                <a:solidFill>
-                  <a:srgbClr val="718096"/>
-                </a:solidFill>
-              </a:rPr>
-              <a:t>→</a:t>
-            </a:r>
-            <a:endParaRPr lang="en-US" sz="1400" dirty="0"/>
+          <p:cNvPr id="21" name="Shape 19"/>
+          <p:cNvSpPr/>
+          <p:nvPr/>
+        </p:nvSpPr>
+        <p:spPr>
+          <a:xfrm>
+            <a:off x="1737360" y="2130552"/>
+            <a:ext cx="256032" cy="0"/>
+          </a:xfrm>
+          <a:prstGeom prst="line">
+            <a:avLst/>
+          </a:prstGeom>
+          <a:noFill/>
+          <a:ln w="19050">
+            <a:solidFill>
+              <a:srgbClr val="718096"/>
+            </a:solidFill>
+            <a:prstDash val="solid"/>
+          </a:ln>
+        </p:spPr>
+        <p:txBody>
+          <a:bodyPr/>
+          <a:lstStyle/>
+          <a:p>
+            <a:endParaRPr lang="en-US"/>
           </a:p>
         </p:txBody>
       </p:sp>
@@ -16675,37 +16501,31 @@
       </p:sp>
       <p:sp>
         <p:nvSpPr>
-          <p:cNvPr id="24" name="Text 22"/>
-          <p:cNvSpPr/>
-          <p:nvPr/>
-        </p:nvSpPr>
-        <p:spPr>
-          <a:xfrm>
-            <a:off x="3529584" y="1911096"/>
-            <a:ext cx="256032" cy="457200"/>
-          </a:xfrm>
-          <a:prstGeom prst="rect">
-            <a:avLst/>
-          </a:prstGeom>
-          <a:noFill/>
-          <a:ln/>
-        </p:spPr>
-        <p:txBody>
-          <a:bodyPr wrap="square" rtlCol="0" anchor="ctr"/>
-          <a:lstStyle/>
-          <a:p>
-            <a:pPr marL="0" indent="0" algn="ctr">
-              <a:buNone/>
-            </a:pPr>
-            <a:r>
-              <a:rPr lang="en-US" sz="1400" dirty="0">
-                <a:solidFill>
-                  <a:srgbClr val="718096"/>
-                </a:solidFill>
-              </a:rPr>
-              <a:t>→</a:t>
-            </a:r>
-            <a:endParaRPr lang="en-US" sz="1400" dirty="0"/>
+          <p:cNvPr id="24" name="Shape 22"/>
+          <p:cNvSpPr/>
+          <p:nvPr/>
+        </p:nvSpPr>
+        <p:spPr>
+          <a:xfrm>
+            <a:off x="3529584" y="2130552"/>
+            <a:ext cx="256032" cy="0"/>
+          </a:xfrm>
+          <a:prstGeom prst="line">
+            <a:avLst/>
+          </a:prstGeom>
+          <a:noFill/>
+          <a:ln w="19050">
+            <a:solidFill>
+              <a:srgbClr val="718096"/>
+            </a:solidFill>
+            <a:prstDash val="solid"/>
+          </a:ln>
+        </p:spPr>
+        <p:txBody>
+          <a:bodyPr/>
+          <a:lstStyle/>
+          <a:p>
+            <a:endParaRPr lang="en-US"/>
           </a:p>
         </p:txBody>
       </p:sp>
@@ -16807,37 +16627,31 @@
       </p:sp>
       <p:sp>
         <p:nvSpPr>
-          <p:cNvPr id="27" name="Text 25"/>
-          <p:cNvSpPr/>
-          <p:nvPr/>
-        </p:nvSpPr>
-        <p:spPr>
-          <a:xfrm>
-            <a:off x="5321808" y="1911096"/>
-            <a:ext cx="256032" cy="457200"/>
-          </a:xfrm>
-          <a:prstGeom prst="rect">
-            <a:avLst/>
-          </a:prstGeom>
-          <a:noFill/>
-          <a:ln/>
-        </p:spPr>
-        <p:txBody>
-          <a:bodyPr wrap="square" rtlCol="0" anchor="ctr"/>
-          <a:lstStyle/>
-          <a:p>
-            <a:pPr marL="0" indent="0" algn="ctr">
-              <a:buNone/>
-            </a:pPr>
-            <a:r>
-              <a:rPr lang="en-US" sz="1400" dirty="0">
-                <a:solidFill>
-                  <a:srgbClr val="718096"/>
-                </a:solidFill>
-              </a:rPr>
-              <a:t>→</a:t>
-            </a:r>
-            <a:endParaRPr lang="en-US" sz="1400" dirty="0"/>
+          <p:cNvPr id="27" name="Shape 25"/>
+          <p:cNvSpPr/>
+          <p:nvPr/>
+        </p:nvSpPr>
+        <p:spPr>
+          <a:xfrm>
+            <a:off x="5321808" y="2130552"/>
+            <a:ext cx="256032" cy="0"/>
+          </a:xfrm>
+          <a:prstGeom prst="line">
+            <a:avLst/>
+          </a:prstGeom>
+          <a:noFill/>
+          <a:ln w="19050">
+            <a:solidFill>
+              <a:srgbClr val="718096"/>
+            </a:solidFill>
+            <a:prstDash val="solid"/>
+          </a:ln>
+        </p:spPr>
+        <p:txBody>
+          <a:bodyPr/>
+          <a:lstStyle/>
+          <a:p>
+            <a:endParaRPr lang="en-US"/>
           </a:p>
         </p:txBody>
       </p:sp>
@@ -16939,37 +16753,31 @@
       </p:sp>
       <p:sp>
         <p:nvSpPr>
-          <p:cNvPr id="30" name="Text 28"/>
-          <p:cNvSpPr/>
-          <p:nvPr/>
-        </p:nvSpPr>
-        <p:spPr>
-          <a:xfrm>
-            <a:off x="7114032" y="1911096"/>
-            <a:ext cx="256032" cy="457200"/>
-          </a:xfrm>
-          <a:prstGeom prst="rect">
-            <a:avLst/>
-          </a:prstGeom>
-          <a:noFill/>
-          <a:ln/>
-        </p:spPr>
-        <p:txBody>
-          <a:bodyPr wrap="square" rtlCol="0" anchor="ctr"/>
-          <a:lstStyle/>
-          <a:p>
-            <a:pPr marL="0" indent="0" algn="ctr">
-              <a:buNone/>
-            </a:pPr>
-            <a:r>
-              <a:rPr lang="en-US" sz="1400" dirty="0">
-                <a:solidFill>
-                  <a:srgbClr val="718096"/>
-                </a:solidFill>
-              </a:rPr>
-              <a:t>→</a:t>
-            </a:r>
-            <a:endParaRPr lang="en-US" sz="1400" dirty="0"/>
+          <p:cNvPr id="30" name="Shape 28"/>
+          <p:cNvSpPr/>
+          <p:nvPr/>
+        </p:nvSpPr>
+        <p:spPr>
+          <a:xfrm>
+            <a:off x="7114032" y="2130552"/>
+            <a:ext cx="256032" cy="0"/>
+          </a:xfrm>
+          <a:prstGeom prst="line">
+            <a:avLst/>
+          </a:prstGeom>
+          <a:noFill/>
+          <a:ln w="19050">
+            <a:solidFill>
+              <a:srgbClr val="718096"/>
+            </a:solidFill>
+            <a:prstDash val="solid"/>
+          </a:ln>
+        </p:spPr>
+        <p:txBody>
+          <a:bodyPr/>
+          <a:lstStyle/>
+          <a:p>
+            <a:endParaRPr lang="en-US"/>
           </a:p>
         </p:txBody>
       </p:sp>
@@ -17071,37 +16879,31 @@
       </p:sp>
       <p:sp>
         <p:nvSpPr>
-          <p:cNvPr id="33" name="Text 31"/>
-          <p:cNvSpPr/>
-          <p:nvPr/>
-        </p:nvSpPr>
-        <p:spPr>
-          <a:xfrm>
-            <a:off x="722376" y="2468880"/>
-            <a:ext cx="457200" cy="256032"/>
-          </a:xfrm>
-          <a:prstGeom prst="rect">
-            <a:avLst/>
-          </a:prstGeom>
-          <a:noFill/>
-          <a:ln/>
-        </p:spPr>
-        <p:txBody>
-          <a:bodyPr wrap="square" rtlCol="0" anchor="ctr"/>
-          <a:lstStyle/>
-          <a:p>
-            <a:pPr marL="0" indent="0" algn="ctr">
-              <a:buNone/>
-            </a:pPr>
-            <a:r>
-              <a:rPr lang="en-US" sz="1400" dirty="0">
-                <a:solidFill>
-                  <a:srgbClr val="718096"/>
-                </a:solidFill>
-              </a:rPr>
-              <a:t>↓</a:t>
-            </a:r>
-            <a:endParaRPr lang="en-US" sz="1400" dirty="0"/>
+          <p:cNvPr id="33" name="Shape 31"/>
+          <p:cNvSpPr/>
+          <p:nvPr/>
+        </p:nvSpPr>
+        <p:spPr>
+          <a:xfrm>
+            <a:off x="941832" y="2468880"/>
+            <a:ext cx="0" cy="256032"/>
+          </a:xfrm>
+          <a:prstGeom prst="line">
+            <a:avLst/>
+          </a:prstGeom>
+          <a:noFill/>
+          <a:ln w="19050">
+            <a:solidFill>
+              <a:srgbClr val="718096"/>
+            </a:solidFill>
+            <a:prstDash val="solid"/>
+          </a:ln>
+        </p:spPr>
+        <p:txBody>
+          <a:bodyPr/>
+          <a:lstStyle/>
+          <a:p>
+            <a:endParaRPr lang="en-US"/>
           </a:p>
         </p:txBody>
       </p:sp>
@@ -17203,37 +17005,31 @@
       </p:sp>
       <p:sp>
         <p:nvSpPr>
-          <p:cNvPr id="36" name="Text 34"/>
-          <p:cNvSpPr/>
-          <p:nvPr/>
-        </p:nvSpPr>
-        <p:spPr>
-          <a:xfrm>
-            <a:off x="2148840" y="2935224"/>
-            <a:ext cx="256032" cy="457200"/>
-          </a:xfrm>
-          <a:prstGeom prst="rect">
-            <a:avLst/>
-          </a:prstGeom>
-          <a:noFill/>
-          <a:ln/>
-        </p:spPr>
-        <p:txBody>
-          <a:bodyPr wrap="square" rtlCol="0" anchor="ctr"/>
-          <a:lstStyle/>
-          <a:p>
-            <a:pPr marL="0" indent="0" algn="ctr">
-              <a:buNone/>
-            </a:pPr>
-            <a:r>
-              <a:rPr lang="en-US" sz="1400" dirty="0">
-                <a:solidFill>
-                  <a:srgbClr val="718096"/>
-                </a:solidFill>
-              </a:rPr>
-              <a:t>→</a:t>
-            </a:r>
-            <a:endParaRPr lang="en-US" sz="1400" dirty="0"/>
+          <p:cNvPr id="36" name="Shape 34"/>
+          <p:cNvSpPr/>
+          <p:nvPr/>
+        </p:nvSpPr>
+        <p:spPr>
+          <a:xfrm>
+            <a:off x="2148840" y="3154680"/>
+            <a:ext cx="256032" cy="0"/>
+          </a:xfrm>
+          <a:prstGeom prst="line">
+            <a:avLst/>
+          </a:prstGeom>
+          <a:noFill/>
+          <a:ln w="19050">
+            <a:solidFill>
+              <a:srgbClr val="718096"/>
+            </a:solidFill>
+            <a:prstDash val="solid"/>
+          </a:ln>
+        </p:spPr>
+        <p:txBody>
+          <a:bodyPr/>
+          <a:lstStyle/>
+          <a:p>
+            <a:endParaRPr lang="en-US"/>
           </a:p>
         </p:txBody>
       </p:sp>
@@ -17335,37 +17131,31 @@
       </p:sp>
       <p:sp>
         <p:nvSpPr>
-          <p:cNvPr id="39" name="Text 37"/>
-          <p:cNvSpPr/>
-          <p:nvPr/>
-        </p:nvSpPr>
-        <p:spPr>
-          <a:xfrm>
-            <a:off x="4315968" y="2935224"/>
-            <a:ext cx="256032" cy="457200"/>
-          </a:xfrm>
-          <a:prstGeom prst="rect">
-            <a:avLst/>
-          </a:prstGeom>
-          <a:noFill/>
-          <a:ln/>
-        </p:spPr>
-        <p:txBody>
-          <a:bodyPr wrap="square" rtlCol="0" anchor="ctr"/>
-          <a:lstStyle/>
-          <a:p>
-            <a:pPr marL="0" indent="0" algn="ctr">
-              <a:buNone/>
-            </a:pPr>
-            <a:r>
-              <a:rPr lang="en-US" sz="1400" dirty="0">
-                <a:solidFill>
-                  <a:srgbClr val="718096"/>
-                </a:solidFill>
-              </a:rPr>
-              <a:t>→</a:t>
-            </a:r>
-            <a:endParaRPr lang="en-US" sz="1400" dirty="0"/>
+          <p:cNvPr id="39" name="Shape 37"/>
+          <p:cNvSpPr/>
+          <p:nvPr/>
+        </p:nvSpPr>
+        <p:spPr>
+          <a:xfrm>
+            <a:off x="4315968" y="3154680"/>
+            <a:ext cx="256032" cy="0"/>
+          </a:xfrm>
+          <a:prstGeom prst="line">
+            <a:avLst/>
+          </a:prstGeom>
+          <a:noFill/>
+          <a:ln w="19050">
+            <a:solidFill>
+              <a:srgbClr val="718096"/>
+            </a:solidFill>
+            <a:prstDash val="solid"/>
+          </a:ln>
+        </p:spPr>
+        <p:txBody>
+          <a:bodyPr/>
+          <a:lstStyle/>
+          <a:p>
+            <a:endParaRPr lang="en-US"/>
           </a:p>
         </p:txBody>
       </p:sp>
@@ -17467,37 +17257,31 @@
       </p:sp>
       <p:sp>
         <p:nvSpPr>
-          <p:cNvPr id="42" name="Text 40"/>
-          <p:cNvSpPr/>
-          <p:nvPr/>
-        </p:nvSpPr>
-        <p:spPr>
-          <a:xfrm>
-            <a:off x="6483096" y="2935224"/>
-            <a:ext cx="256032" cy="457200"/>
-          </a:xfrm>
-          <a:prstGeom prst="rect">
-            <a:avLst/>
-          </a:prstGeom>
-          <a:noFill/>
-          <a:ln/>
-        </p:spPr>
-        <p:txBody>
-          <a:bodyPr wrap="square" rtlCol="0" anchor="ctr"/>
-          <a:lstStyle/>
-          <a:p>
-            <a:pPr marL="0" indent="0" algn="ctr">
-              <a:buNone/>
-            </a:pPr>
-            <a:r>
-              <a:rPr lang="en-US" sz="1400" dirty="0">
-                <a:solidFill>
-                  <a:srgbClr val="718096"/>
-                </a:solidFill>
-              </a:rPr>
-              <a:t>→</a:t>
-            </a:r>
-            <a:endParaRPr lang="en-US" sz="1400" dirty="0"/>
+          <p:cNvPr id="42" name="Shape 40"/>
+          <p:cNvSpPr/>
+          <p:nvPr/>
+        </p:nvSpPr>
+        <p:spPr>
+          <a:xfrm>
+            <a:off x="6483096" y="3154680"/>
+            <a:ext cx="256032" cy="0"/>
+          </a:xfrm>
+          <a:prstGeom prst="line">
+            <a:avLst/>
+          </a:prstGeom>
+          <a:noFill/>
+          <a:ln w="19050">
+            <a:solidFill>
+              <a:srgbClr val="718096"/>
+            </a:solidFill>
+            <a:prstDash val="solid"/>
+          </a:ln>
+        </p:spPr>
+        <p:txBody>
+          <a:bodyPr/>
+          <a:lstStyle/>
+          <a:p>
+            <a:endParaRPr lang="en-US"/>
           </a:p>
         </p:txBody>
       </p:sp>
@@ -18136,7 +17920,7 @@
                   <a:srgbClr val="9B2C2C"/>
                 </a:solidFill>
               </a:rPr>
-              <a:t>⚠  Manual EHR login to multiple facilities</a:t>
+              <a:t>[!] Manual EHR login to multiple facilities</a:t>
             </a:r>
             <a:endParaRPr lang="en-US" sz="850" dirty="0"/>
           </a:p>
@@ -18204,7 +17988,7 @@
                   <a:srgbClr val="9B2C2C"/>
                 </a:solidFill>
               </a:rPr>
-              <a:t>⚠  No automated triggers for review (new admit, order change)</a:t>
+              <a:t>[!] No automated triggers for review (new admit, order change)</a:t>
             </a:r>
             <a:endParaRPr lang="en-US" sz="850" dirty="0"/>
           </a:p>
@@ -18272,7 +18056,7 @@
                   <a:srgbClr val="9B2C2C"/>
                 </a:solidFill>
               </a:rPr>
-              <a:t>⚠  Manual template selection from 300+ options</a:t>
+              <a:t>[!] Manual template selection from 300+ options</a:t>
             </a:r>
             <a:endParaRPr lang="en-US" sz="850" dirty="0"/>
           </a:p>
@@ -18340,7 +18124,7 @@
                   <a:srgbClr val="9B2C2C"/>
                 </a:solidFill>
               </a:rPr>
-              <a:t>⚠  Double documentation: EHR + consulting software</a:t>
+              <a:t>[!] Double documentation: EHR + consulting software</a:t>
             </a:r>
             <a:endParaRPr lang="en-US" sz="850" dirty="0"/>
           </a:p>
@@ -18408,7 +18192,7 @@
                   <a:srgbClr val="9B2C2C"/>
                 </a:solidFill>
               </a:rPr>
-              <a:t>⚠  Manual drug-interaction lookups (no integrated DB)</a:t>
+              <a:t>[!] Manual drug-interaction lookups (no integrated DB)</a:t>
             </a:r>
             <a:endParaRPr lang="en-US" sz="850" dirty="0"/>
           </a:p>
@@ -18476,7 +18260,7 @@
                   <a:srgbClr val="9B2C2C"/>
                 </a:solidFill>
               </a:rPr>
-              <a:t>⚠  PDF census tracking — manual check-off per resident</a:t>
+              <a:t>[!] PDF census tracking — manual check-off per resident</a:t>
             </a:r>
             <a:endParaRPr lang="en-US" sz="850" dirty="0"/>
           </a:p>
@@ -18544,7 +18328,7 @@
                   <a:srgbClr val="9B2C2C"/>
                 </a:solidFill>
               </a:rPr>
-              <a:t>⚠  ~40 patients/day high cognitive load per pharmacist</a:t>
+              <a:t>[!] ~40 patients/day high cognitive load per pharmacist</a:t>
             </a:r>
             <a:endParaRPr lang="en-US" sz="850" dirty="0"/>
           </a:p>
@@ -18612,7 +18396,7 @@
                   <a:srgbClr val="9B2C2C"/>
                 </a:solidFill>
               </a:rPr>
-              <a:t>⚠  Limited data integration between EHR systems</a:t>
+              <a:t>[!] Limited data integration between EHR systems</a:t>
             </a:r>
             <a:endParaRPr lang="en-US" sz="850" dirty="0"/>
           </a:p>
@@ -18680,7 +18464,7 @@
                   <a:srgbClr val="9B2C2C"/>
                 </a:solidFill>
               </a:rPr>
-              <a:t>⚠  Medication reconciliation is 100% manual (pre-hospital, hospital, post-discharge)</a:t>
+              <a:t>[!] Medication reconciliation is 100% manual (pre-hospital, hospital, post-discharge)</a:t>
             </a:r>
             <a:endParaRPr lang="en-US" sz="850" dirty="0"/>
           </a:p>
@@ -18748,7 +18532,7 @@
                   <a:srgbClr val="9B2C2C"/>
                 </a:solidFill>
               </a:rPr>
-              <a:t>⚠  CRM time-keeping: manual charting &amp; documenting consultant hours</a:t>
+              <a:t>[!] CRM time-keeping: manual charting &amp; documenting consultant hours</a:t>
             </a:r>
             <a:endParaRPr lang="en-US" sz="850" dirty="0"/>
           </a:p>
@@ -18816,7 +18600,7 @@
                   <a:srgbClr val="9B2C2C"/>
                 </a:solidFill>
               </a:rPr>
-              <a:t>⚠  Notes, vitals, labs, orders all in separate EHR tabs — no unified view</a:t>
+              <a:t>[!] Notes, vitals, labs, orders all in separate EHR tabs — no unified view</a:t>
             </a:r>
             <a:endParaRPr lang="en-US" sz="850" dirty="0"/>
           </a:p>
@@ -18952,7 +18736,7 @@
                   <a:srgbClr val="276749"/>
                 </a:solidFill>
               </a:rPr>
-              <a:t>✗  No system-enforced monthly MRR cadence tracking</a:t>
+              <a:t>[X] No system-enforced monthly MRR cadence tracking</a:t>
             </a:r>
             <a:endParaRPr lang="en-US" sz="850" dirty="0"/>
           </a:p>
@@ -19020,7 +18804,7 @@
                   <a:srgbClr val="276749"/>
                 </a:solidFill>
               </a:rPr>
-              <a:t>✗  Physician response not digitally tracked in one place</a:t>
+              <a:t>[X] Physician response not digitally tracked in one place</a:t>
             </a:r>
             <a:endParaRPr lang="en-US" sz="850" dirty="0"/>
           </a:p>
@@ -19088,7 +18872,7 @@
                   <a:srgbClr val="276749"/>
                 </a:solidFill>
               </a:rPr>
-              <a:t>✗  No SLA enforcement (urgent: same-day; normal: 30-day)</a:t>
+              <a:t>[X] No SLA enforcement (urgent: same-day; normal: 30-day)</a:t>
             </a:r>
             <a:endParaRPr lang="en-US" sz="850" dirty="0"/>
           </a:p>
@@ -19156,7 +18940,7 @@
                   <a:srgbClr val="276749"/>
                 </a:solidFill>
               </a:rPr>
-              <a:t>✗  Irregularity reports manually created — no standard format</a:t>
+              <a:t>[X] Irregularity reports manually created — no standard format</a:t>
             </a:r>
             <a:endParaRPr lang="en-US" sz="850" dirty="0"/>
           </a:p>
@@ -19224,7 +19008,7 @@
                   <a:srgbClr val="276749"/>
                 </a:solidFill>
               </a:rPr>
-              <a:t>✗  No automated distribution to MD, Medical Director, DON</a:t>
+              <a:t>[X] No automated distribution to MD, Medical Director, DON</a:t>
             </a:r>
             <a:endParaRPr lang="en-US" sz="850" dirty="0"/>
           </a:p>
@@ -19292,7 +19076,7 @@
                   <a:srgbClr val="276749"/>
                 </a:solidFill>
               </a:rPr>
-              <a:t>✗  No automated escalation for urgent irregularities</a:t>
+              <a:t>[X] No automated escalation for urgent irregularities</a:t>
             </a:r>
             <a:endParaRPr lang="en-US" sz="850" dirty="0"/>
           </a:p>
@@ -19360,7 +19144,7 @@
                   <a:srgbClr val="276749"/>
                 </a:solidFill>
               </a:rPr>
-              <a:t>✗  P&amp;P time frames not enforced by any system</a:t>
+              <a:t>[X] P&amp;P time frames not enforced by any system</a:t>
             </a:r>
             <a:endParaRPr lang="en-US" sz="850" dirty="0"/>
           </a:p>
@@ -19428,7 +19212,7 @@
                   <a:srgbClr val="276749"/>
                 </a:solidFill>
               </a:rPr>
-              <a:t>✗  No audit trail linking review → report → physician response</a:t>
+              <a:t>[X] No audit trail linking review &gt;&gt; report &gt;&gt; physician response</a:t>
             </a:r>
             <a:endParaRPr lang="en-US" sz="850" dirty="0"/>
           </a:p>
@@ -19496,7 +19280,7 @@
                   <a:srgbClr val="276749"/>
                 </a:solidFill>
               </a:rPr>
-              <a:t>✗  Monthly CMS summary report compiled manually per facility</a:t>
+              <a:t>[X] Monthly CMS summary report compiled manually per facility</a:t>
             </a:r>
             <a:endParaRPr lang="en-US" sz="850" dirty="0"/>
           </a:p>
@@ -19564,7 +19348,7 @@
                   <a:srgbClr val="276749"/>
                 </a:solidFill>
               </a:rPr>
-              <a:t>✗  No Epic integration — Phase 2 requirement</a:t>
+              <a:t>[X] No Epic integration — Phase 2 requirement</a:t>
             </a:r>
             <a:endParaRPr lang="en-US" sz="850" dirty="0"/>
           </a:p>
@@ -19632,7 +19416,7 @@
                   <a:srgbClr val="276749"/>
                 </a:solidFill>
               </a:rPr>
-              <a:t>✗  Full EHR writeback not yet automated</a:t>
+              <a:t>[X] Full EHR writeback not yet automated</a:t>
             </a:r>
             <a:endParaRPr lang="en-US" sz="850" dirty="0"/>
           </a:p>
@@ -25432,7 +25216,7 @@
                   <a:srgbClr val="2D3748"/>
                 </a:solidFill>
               </a:rPr>
-              <a:t>AI generates recommendation  →  Pharmacist reviews (Accept / Modify / Reject)  →  Approved recommendation sent to physician.  This HITL step protects against AI errors and satisfies CMS clinical accountability requirements.</a:t>
+              <a:t>AI generates recommendation  &gt;&gt;  Pharmacist reviews (Accept / Modify / Reject)  &gt;&gt;  Approved recommendation sent to physician.  This HITL step protects against AI errors and satisfies CMS clinical accountability requirements.</a:t>
             </a:r>
             <a:endParaRPr lang="en-US" sz="950" dirty="0"/>
           </a:p>
